--- a/autumn/sem_1_basics/presentations/Семинар_1_basics.pptx
+++ b/autumn/sem_1_basics/presentations/Семинар_1_basics.pptx
@@ -5,10 +5,12 @@
     <p:sldMasterId id="2147483648" r:id="rId1"/>
   </p:sldMasterIdLst>
   <p:sldIdLst>
-    <p:sldId id="256" r:id="rId6"/>
-    <p:sldId id="257" r:id="rId7"/>
-    <p:sldId id="258" r:id="rId8"/>
-    <p:sldId id="259" r:id="rId9"/>
+    <p:sldId id="256" r:id="rId2"/>
+    <p:sldId id="261" r:id="rId3"/>
+    <p:sldId id="260" r:id="rId4"/>
+    <p:sldId id="257" r:id="rId5"/>
+    <p:sldId id="258" r:id="rId6"/>
+    <p:sldId id="259" r:id="rId7"/>
   </p:sldIdLst>
   <p:sldSz cx="12192000" cy="6858000"/>
   <p:notesSz cx="12192000" cy="6858000"/>
@@ -17,11 +19,27 @@
       <a:defRPr kern="0"/>
     </a:defPPr>
   </p:defaultTextStyle>
+  <p:extLst>
+    <p:ext uri="{EFAFB233-063F-42B5-8137-9DF3F51BA10A}">
+      <p15:sldGuideLst xmlns:p15="http://schemas.microsoft.com/office/powerpoint/2012/main">
+        <p15:guide id="1" orient="horz" pos="2880">
+          <p15:clr>
+            <a:srgbClr val="A4A3A4"/>
+          </p15:clr>
+        </p15:guide>
+        <p15:guide id="2" pos="2160">
+          <p15:clr>
+            <a:srgbClr val="A4A3A4"/>
+          </p15:clr>
+        </p15:guide>
+      </p15:sldGuideLst>
+    </p:ext>
+  </p:extLst>
 </p:presentation>
 </file>
 
 <file path=ppt/slideLayouts/slideLayout1.xml><?xml version="1.0" encoding="utf-8"?>
-<p:sldLayout xmlns:a="http://schemas.openxmlformats.org/drawingml/2006/main" xmlns:r="http://schemas.openxmlformats.org/officeDocument/2006/relationships" xmlns:p="http://schemas.openxmlformats.org/presentationml/2006/main" preserve="1" type="obj">
+<p:sldLayout xmlns:a="http://schemas.openxmlformats.org/drawingml/2006/main" xmlns:r="http://schemas.openxmlformats.org/officeDocument/2006/relationships" xmlns:p="http://schemas.openxmlformats.org/presentationml/2006/main" type="obj" preserve="1">
   <p:cSld name="Title Slide">
     <p:spTree>
       <p:nvGrpSpPr>
@@ -71,7 +89,9 @@
               </a:defRPr>
             </a:lvl1pPr>
           </a:lstStyle>
-          <a:p/>
+          <a:p>
+            <a:endParaRPr/>
+          </a:p>
         </p:txBody>
       </p:sp>
       <p:sp>
@@ -108,7 +128,9 @@
               </a:defRPr>
             </a:lvl1pPr>
           </a:lstStyle>
-          <a:p/>
+          <a:p>
+            <a:endParaRPr/>
+          </a:p>
         </p:txBody>
       </p:sp>
       <p:sp>
@@ -118,7 +140,7 @@
             <a:spLocks noGrp="1"/>
           </p:cNvSpPr>
           <p:nvPr>
-            <p:ph type="ftr" idx="5" sz="quarter"/>
+            <p:ph type="ftr" sz="quarter" idx="5"/>
           </p:nvPr>
         </p:nvSpPr>
         <p:spPr/>
@@ -135,7 +157,9 @@
               </a:defRPr>
             </a:lvl1pPr>
           </a:lstStyle>
-          <a:p/>
+          <a:p>
+            <a:endParaRPr/>
+          </a:p>
         </p:txBody>
       </p:sp>
       <p:sp>
@@ -145,7 +169,7 @@
             <a:spLocks noGrp="1"/>
           </p:cNvSpPr>
           <p:nvPr>
-            <p:ph type="dt" idx="6" sz="half"/>
+            <p:ph type="dt" sz="half" idx="6"/>
           </p:nvPr>
         </p:nvSpPr>
         <p:spPr/>
@@ -165,7 +189,9 @@
           <a:p>
             <a:fld id="{1D8BD707-D9CF-40AE-B4C6-C98DA3205C09}" type="datetimeFigureOut">
               <a:rPr lang="en-US"/>
+              <a:t>8/31/2025</a:t>
             </a:fld>
+            <a:endParaRPr lang="en-US"/>
           </a:p>
         </p:txBody>
       </p:sp>
@@ -176,7 +202,7 @@
             <a:spLocks noGrp="1"/>
           </p:cNvSpPr>
           <p:nvPr>
-            <p:ph type="sldNum" idx="7" sz="quarter"/>
+            <p:ph type="sldNum" sz="quarter" idx="7"/>
           </p:nvPr>
         </p:nvSpPr>
         <p:spPr/>
@@ -195,8 +221,9 @@
           </a:lstStyle>
           <a:p>
             <a:fld id="{B6F15528-21DE-4FAA-801E-634DDDAF4B2B}" type="slidenum">
-              <a:t>#</a:t>
+              <a:t>‹#›</a:t>
             </a:fld>
+            <a:endParaRPr/>
           </a:p>
         </p:txBody>
       </p:sp>
@@ -209,7 +236,7 @@
 </file>
 
 <file path=ppt/slideLayouts/slideLayout2.xml><?xml version="1.0" encoding="utf-8"?>
-<p:sldLayout xmlns:a="http://schemas.openxmlformats.org/drawingml/2006/main" xmlns:r="http://schemas.openxmlformats.org/officeDocument/2006/relationships" xmlns:p="http://schemas.openxmlformats.org/presentationml/2006/main" preserve="1" type="obj">
+<p:sldLayout xmlns:a="http://schemas.openxmlformats.org/drawingml/2006/main" xmlns:r="http://schemas.openxmlformats.org/officeDocument/2006/relationships" xmlns:p="http://schemas.openxmlformats.org/presentationml/2006/main" type="obj" preserve="1">
   <p:cSld name="Title and Content">
     <p:spTree>
       <p:nvGrpSpPr>
@@ -249,7 +276,9 @@
               </a:defRPr>
             </a:lvl1pPr>
           </a:lstStyle>
-          <a:p/>
+          <a:p>
+            <a:endParaRPr/>
+          </a:p>
         </p:txBody>
       </p:sp>
       <p:sp>
@@ -276,7 +305,9 @@
               </a:defRPr>
             </a:lvl1pPr>
           </a:lstStyle>
-          <a:p/>
+          <a:p>
+            <a:endParaRPr/>
+          </a:p>
         </p:txBody>
       </p:sp>
       <p:sp>
@@ -286,7 +317,7 @@
             <a:spLocks noGrp="1"/>
           </p:cNvSpPr>
           <p:nvPr>
-            <p:ph type="ftr" idx="5" sz="quarter"/>
+            <p:ph type="ftr" sz="quarter" idx="5"/>
           </p:nvPr>
         </p:nvSpPr>
         <p:spPr/>
@@ -303,7 +334,9 @@
               </a:defRPr>
             </a:lvl1pPr>
           </a:lstStyle>
-          <a:p/>
+          <a:p>
+            <a:endParaRPr/>
+          </a:p>
         </p:txBody>
       </p:sp>
       <p:sp>
@@ -313,7 +346,7 @@
             <a:spLocks noGrp="1"/>
           </p:cNvSpPr>
           <p:nvPr>
-            <p:ph type="dt" idx="6" sz="half"/>
+            <p:ph type="dt" sz="half" idx="6"/>
           </p:nvPr>
         </p:nvSpPr>
         <p:spPr/>
@@ -333,7 +366,9 @@
           <a:p>
             <a:fld id="{1D8BD707-D9CF-40AE-B4C6-C98DA3205C09}" type="datetimeFigureOut">
               <a:rPr lang="en-US"/>
+              <a:t>8/31/2025</a:t>
             </a:fld>
+            <a:endParaRPr lang="en-US"/>
           </a:p>
         </p:txBody>
       </p:sp>
@@ -344,7 +379,7 @@
             <a:spLocks noGrp="1"/>
           </p:cNvSpPr>
           <p:nvPr>
-            <p:ph type="sldNum" idx="7" sz="quarter"/>
+            <p:ph type="sldNum" sz="quarter" idx="7"/>
           </p:nvPr>
         </p:nvSpPr>
         <p:spPr/>
@@ -363,8 +398,9 @@
           </a:lstStyle>
           <a:p>
             <a:fld id="{B6F15528-21DE-4FAA-801E-634DDDAF4B2B}" type="slidenum">
-              <a:t>#</a:t>
+              <a:t>‹#›</a:t>
             </a:fld>
+            <a:endParaRPr/>
           </a:p>
         </p:txBody>
       </p:sp>
@@ -377,7 +413,7 @@
 </file>
 
 <file path=ppt/slideLayouts/slideLayout3.xml><?xml version="1.0" encoding="utf-8"?>
-<p:sldLayout xmlns:a="http://schemas.openxmlformats.org/drawingml/2006/main" xmlns:r="http://schemas.openxmlformats.org/officeDocument/2006/relationships" xmlns:p="http://schemas.openxmlformats.org/presentationml/2006/main" preserve="1" type="obj">
+<p:sldLayout xmlns:a="http://schemas.openxmlformats.org/drawingml/2006/main" xmlns:r="http://schemas.openxmlformats.org/officeDocument/2006/relationships" xmlns:p="http://schemas.openxmlformats.org/presentationml/2006/main" type="obj" preserve="1">
   <p:cSld name="Two Content">
     <p:spTree>
       <p:nvGrpSpPr>
@@ -417,7 +453,9 @@
               </a:defRPr>
             </a:lvl1pPr>
           </a:lstStyle>
-          <a:p/>
+          <a:p>
+            <a:endParaRPr/>
+          </a:p>
         </p:txBody>
       </p:sp>
       <p:sp>
@@ -427,7 +465,7 @@
             <a:spLocks noGrp="1"/>
           </p:cNvSpPr>
           <p:nvPr>
-            <p:ph idx="2" sz="half"/>
+            <p:ph sz="half" idx="2"/>
           </p:nvPr>
         </p:nvSpPr>
         <p:spPr>
@@ -448,7 +486,9 @@
               <a:defRPr/>
             </a:lvl1pPr>
           </a:lstStyle>
-          <a:p/>
+          <a:p>
+            <a:endParaRPr/>
+          </a:p>
         </p:txBody>
       </p:sp>
       <p:sp>
@@ -458,7 +498,7 @@
             <a:spLocks noGrp="1"/>
           </p:cNvSpPr>
           <p:nvPr>
-            <p:ph idx="3" sz="half"/>
+            <p:ph sz="half" idx="3"/>
           </p:nvPr>
         </p:nvSpPr>
         <p:spPr>
@@ -479,7 +519,9 @@
               <a:defRPr/>
             </a:lvl1pPr>
           </a:lstStyle>
-          <a:p/>
+          <a:p>
+            <a:endParaRPr/>
+          </a:p>
         </p:txBody>
       </p:sp>
       <p:sp>
@@ -489,7 +531,7 @@
             <a:spLocks noGrp="1"/>
           </p:cNvSpPr>
           <p:nvPr>
-            <p:ph type="ftr" idx="5" sz="quarter"/>
+            <p:ph type="ftr" sz="quarter" idx="5"/>
           </p:nvPr>
         </p:nvSpPr>
         <p:spPr/>
@@ -506,7 +548,9 @@
               </a:defRPr>
             </a:lvl1pPr>
           </a:lstStyle>
-          <a:p/>
+          <a:p>
+            <a:endParaRPr/>
+          </a:p>
         </p:txBody>
       </p:sp>
       <p:sp>
@@ -516,7 +560,7 @@
             <a:spLocks noGrp="1"/>
           </p:cNvSpPr>
           <p:nvPr>
-            <p:ph type="dt" idx="6" sz="half"/>
+            <p:ph type="dt" sz="half" idx="6"/>
           </p:nvPr>
         </p:nvSpPr>
         <p:spPr/>
@@ -536,7 +580,9 @@
           <a:p>
             <a:fld id="{1D8BD707-D9CF-40AE-B4C6-C98DA3205C09}" type="datetimeFigureOut">
               <a:rPr lang="en-US"/>
+              <a:t>8/31/2025</a:t>
             </a:fld>
+            <a:endParaRPr lang="en-US"/>
           </a:p>
         </p:txBody>
       </p:sp>
@@ -547,7 +593,7 @@
             <a:spLocks noGrp="1"/>
           </p:cNvSpPr>
           <p:nvPr>
-            <p:ph type="sldNum" idx="7" sz="quarter"/>
+            <p:ph type="sldNum" sz="quarter" idx="7"/>
           </p:nvPr>
         </p:nvSpPr>
         <p:spPr/>
@@ -566,8 +612,9 @@
           </a:lstStyle>
           <a:p>
             <a:fld id="{B6F15528-21DE-4FAA-801E-634DDDAF4B2B}" type="slidenum">
-              <a:t>#</a:t>
+              <a:t>‹#›</a:t>
             </a:fld>
+            <a:endParaRPr/>
           </a:p>
         </p:txBody>
       </p:sp>
@@ -580,7 +627,7 @@
 </file>
 
 <file path=ppt/slideLayouts/slideLayout4.xml><?xml version="1.0" encoding="utf-8"?>
-<p:sldLayout xmlns:a="http://schemas.openxmlformats.org/drawingml/2006/main" xmlns:r="http://schemas.openxmlformats.org/officeDocument/2006/relationships" xmlns:p="http://schemas.openxmlformats.org/presentationml/2006/main" preserve="1" type="obj">
+<p:sldLayout xmlns:a="http://schemas.openxmlformats.org/drawingml/2006/main" xmlns:r="http://schemas.openxmlformats.org/officeDocument/2006/relationships" xmlns:p="http://schemas.openxmlformats.org/presentationml/2006/main" type="obj" preserve="1">
   <p:cSld name="Title Only">
     <p:spTree>
       <p:nvGrpSpPr>
@@ -620,7 +667,9 @@
               </a:defRPr>
             </a:lvl1pPr>
           </a:lstStyle>
-          <a:p/>
+          <a:p>
+            <a:endParaRPr/>
+          </a:p>
         </p:txBody>
       </p:sp>
       <p:sp>
@@ -630,7 +679,7 @@
             <a:spLocks noGrp="1"/>
           </p:cNvSpPr>
           <p:nvPr>
-            <p:ph type="ftr" idx="5" sz="quarter"/>
+            <p:ph type="ftr" sz="quarter" idx="5"/>
           </p:nvPr>
         </p:nvSpPr>
         <p:spPr/>
@@ -647,7 +696,9 @@
               </a:defRPr>
             </a:lvl1pPr>
           </a:lstStyle>
-          <a:p/>
+          <a:p>
+            <a:endParaRPr/>
+          </a:p>
         </p:txBody>
       </p:sp>
       <p:sp>
@@ -657,7 +708,7 @@
             <a:spLocks noGrp="1"/>
           </p:cNvSpPr>
           <p:nvPr>
-            <p:ph type="dt" idx="6" sz="half"/>
+            <p:ph type="dt" sz="half" idx="6"/>
           </p:nvPr>
         </p:nvSpPr>
         <p:spPr/>
@@ -677,7 +728,9 @@
           <a:p>
             <a:fld id="{1D8BD707-D9CF-40AE-B4C6-C98DA3205C09}" type="datetimeFigureOut">
               <a:rPr lang="en-US"/>
+              <a:t>8/31/2025</a:t>
             </a:fld>
+            <a:endParaRPr lang="en-US"/>
           </a:p>
         </p:txBody>
       </p:sp>
@@ -688,7 +741,7 @@
             <a:spLocks noGrp="1"/>
           </p:cNvSpPr>
           <p:nvPr>
-            <p:ph type="sldNum" idx="7" sz="quarter"/>
+            <p:ph type="sldNum" sz="quarter" idx="7"/>
           </p:nvPr>
         </p:nvSpPr>
         <p:spPr/>
@@ -707,8 +760,9 @@
           </a:lstStyle>
           <a:p>
             <a:fld id="{B6F15528-21DE-4FAA-801E-634DDDAF4B2B}" type="slidenum">
-              <a:t>#</a:t>
+              <a:t>‹#›</a:t>
             </a:fld>
+            <a:endParaRPr/>
           </a:p>
         </p:txBody>
       </p:sp>
@@ -721,7 +775,7 @@
 </file>
 
 <file path=ppt/slideLayouts/slideLayout5.xml><?xml version="1.0" encoding="utf-8"?>
-<p:sldLayout xmlns:a="http://schemas.openxmlformats.org/drawingml/2006/main" xmlns:r="http://schemas.openxmlformats.org/officeDocument/2006/relationships" xmlns:p="http://schemas.openxmlformats.org/presentationml/2006/main" preserve="1" type="obj">
+<p:sldLayout xmlns:a="http://schemas.openxmlformats.org/drawingml/2006/main" xmlns:r="http://schemas.openxmlformats.org/officeDocument/2006/relationships" xmlns:p="http://schemas.openxmlformats.org/presentationml/2006/main" type="obj" preserve="1">
   <p:cSld name="Blank">
     <p:spTree>
       <p:nvGrpSpPr>
@@ -744,7 +798,7 @@
             <a:spLocks noGrp="1"/>
           </p:cNvSpPr>
           <p:nvPr>
-            <p:ph type="ftr" idx="5" sz="quarter"/>
+            <p:ph type="ftr" sz="quarter" idx="5"/>
           </p:nvPr>
         </p:nvSpPr>
         <p:spPr/>
@@ -761,7 +815,9 @@
               </a:defRPr>
             </a:lvl1pPr>
           </a:lstStyle>
-          <a:p/>
+          <a:p>
+            <a:endParaRPr/>
+          </a:p>
         </p:txBody>
       </p:sp>
       <p:sp>
@@ -771,7 +827,7 @@
             <a:spLocks noGrp="1"/>
           </p:cNvSpPr>
           <p:nvPr>
-            <p:ph type="dt" idx="6" sz="half"/>
+            <p:ph type="dt" sz="half" idx="6"/>
           </p:nvPr>
         </p:nvSpPr>
         <p:spPr/>
@@ -791,7 +847,9 @@
           <a:p>
             <a:fld id="{1D8BD707-D9CF-40AE-B4C6-C98DA3205C09}" type="datetimeFigureOut">
               <a:rPr lang="en-US"/>
+              <a:t>8/31/2025</a:t>
             </a:fld>
+            <a:endParaRPr lang="en-US"/>
           </a:p>
         </p:txBody>
       </p:sp>
@@ -802,7 +860,7 @@
             <a:spLocks noGrp="1"/>
           </p:cNvSpPr>
           <p:nvPr>
-            <p:ph type="sldNum" idx="7" sz="quarter"/>
+            <p:ph type="sldNum" sz="quarter" idx="7"/>
           </p:nvPr>
         </p:nvSpPr>
         <p:spPr/>
@@ -821,8 +879,9 @@
           </a:lstStyle>
           <a:p>
             <a:fld id="{B6F15528-21DE-4FAA-801E-634DDDAF4B2B}" type="slidenum">
-              <a:t>#</a:t>
+              <a:t>‹#›</a:t>
             </a:fld>
+            <a:endParaRPr/>
           </a:p>
         </p:txBody>
       </p:sp>
@@ -893,7 +952,9 @@
               </a:defRPr>
             </a:lvl1pPr>
           </a:lstStyle>
-          <a:p/>
+          <a:p>
+            <a:endParaRPr/>
+          </a:p>
         </p:txBody>
       </p:sp>
       <p:sp>
@@ -930,7 +991,9 @@
               </a:defRPr>
             </a:lvl1pPr>
           </a:lstStyle>
-          <a:p/>
+          <a:p>
+            <a:endParaRPr/>
+          </a:p>
         </p:txBody>
       </p:sp>
       <p:sp>
@@ -940,7 +1003,7 @@
             <a:spLocks noGrp="1"/>
           </p:cNvSpPr>
           <p:nvPr>
-            <p:ph type="ftr" idx="5" sz="quarter"/>
+            <p:ph type="ftr" sz="quarter" idx="5"/>
           </p:nvPr>
         </p:nvSpPr>
         <p:spPr>
@@ -967,7 +1030,9 @@
               </a:defRPr>
             </a:lvl1pPr>
           </a:lstStyle>
-          <a:p/>
+          <a:p>
+            <a:endParaRPr/>
+          </a:p>
         </p:txBody>
       </p:sp>
       <p:sp>
@@ -977,7 +1042,7 @@
             <a:spLocks noGrp="1"/>
           </p:cNvSpPr>
           <p:nvPr>
-            <p:ph type="dt" idx="6" sz="half"/>
+            <p:ph type="dt" sz="half" idx="6"/>
           </p:nvPr>
         </p:nvSpPr>
         <p:spPr>
@@ -1007,7 +1072,9 @@
           <a:p>
             <a:fld id="{1D8BD707-D9CF-40AE-B4C6-C98DA3205C09}" type="datetimeFigureOut">
               <a:rPr lang="en-US"/>
+              <a:t>8/31/2025</a:t>
             </a:fld>
+            <a:endParaRPr lang="en-US"/>
           </a:p>
         </p:txBody>
       </p:sp>
@@ -1018,7 +1085,7 @@
             <a:spLocks noGrp="1"/>
           </p:cNvSpPr>
           <p:nvPr>
-            <p:ph type="sldNum" idx="7" sz="quarter"/>
+            <p:ph type="sldNum" sz="quarter" idx="7"/>
           </p:nvPr>
         </p:nvSpPr>
         <p:spPr>
@@ -1047,14 +1114,15 @@
           </a:lstStyle>
           <a:p>
             <a:fld id="{B6F15528-21DE-4FAA-801E-634DDDAF4B2B}" type="slidenum">
-              <a:t>#</a:t>
+              <a:t>‹#›</a:t>
             </a:fld>
+            <a:endParaRPr/>
           </a:p>
         </p:txBody>
       </p:sp>
     </p:spTree>
   </p:cSld>
-  <p:clrMap folHlink="folHlink" hlink="hlink" accent1="accent1" accent2="accent2" accent3="accent3" accent4="accent4" accent5="accent5" accent6="accent6" tx2="dk2" bg2="lt2" tx1="dk1" bg1="lt1"/>
+  <p:clrMap bg1="lt1" tx1="dk1" bg2="lt2" tx2="dk2" accent1="accent1" accent2="accent2" accent3="accent3" accent4="accent4" accent5="accent5" accent6="accent6" hlink="hlink" folHlink="folHlink"/>
   <p:sldLayoutIdLst>
     <p:sldLayoutId id="2147483661" r:id="rId1"/>
     <p:sldLayoutId id="2147483662" r:id="rId2"/>
@@ -1234,10 +1302,12 @@
           </p:nvPr>
         </p:nvSpPr>
         <p:spPr>
-          <a:prstGeom prst="rect"/>
+          <a:prstGeom prst="rect">
+            <a:avLst/>
+          </a:prstGeom>
         </p:spPr>
         <p:txBody>
-          <a:bodyPr wrap="square" lIns="0" tIns="12700" rIns="0" bIns="0" rtlCol="0" vert="horz">
+          <a:bodyPr vert="horz" wrap="square" lIns="0" tIns="12700" rIns="0" bIns="0" rtlCol="0">
             <a:spAutoFit/>
           </a:bodyPr>
           <a:lstStyle/>
@@ -1251,40 +1321,44 @@
               </a:spcBef>
             </a:pPr>
             <a:r>
-              <a:rPr dirty="0" sz="4500"/>
+              <a:rPr sz="4500" dirty="0"/>
               <a:t>Семинар</a:t>
             </a:r>
             <a:r>
-              <a:rPr dirty="0" sz="4500" spc="-75"/>
-              <a:t> </a:t>
-            </a:r>
-            <a:r>
-              <a:rPr dirty="0" sz="4500"/>
+              <a:rPr sz="4500" spc="-75" dirty="0"/>
+              <a:t> </a:t>
+            </a:r>
+            <a:r>
+              <a:rPr sz="4500" dirty="0"/>
               <a:t>по</a:t>
             </a:r>
             <a:r>
-              <a:rPr dirty="0" sz="4500" spc="-45"/>
-              <a:t> </a:t>
-            </a:r>
-            <a:r>
-              <a:rPr dirty="0" sz="4500"/>
+              <a:rPr sz="4500" spc="-45" dirty="0"/>
+              <a:t> </a:t>
+            </a:r>
+            <a:r>
+              <a:rPr sz="4500" dirty="0"/>
               <a:t>С++</a:t>
             </a:r>
             <a:r>
-              <a:rPr dirty="0" sz="4500" spc="-55"/>
-              <a:t> </a:t>
-            </a:r>
-            <a:r>
-              <a:rPr dirty="0" sz="4500" spc="100"/>
-              <a:t>№2</a:t>
-            </a:r>
-            <a:endParaRPr sz="4500"/>
-          </a:p>
-        </p:txBody>
-      </p:sp>
-      <p:sp>
-        <p:nvSpPr>
-          <p:cNvPr id="3" name="object 3" descr=""/>
+              <a:rPr sz="4500" spc="-55" dirty="0"/>
+              <a:t> </a:t>
+            </a:r>
+            <a:r>
+              <a:rPr sz="4500" spc="100" dirty="0"/>
+              <a:t>№</a:t>
+            </a:r>
+            <a:r>
+              <a:rPr lang="en-US" sz="4500" spc="100" dirty="0"/>
+              <a:t>1</a:t>
+            </a:r>
+            <a:endParaRPr sz="4500" dirty="0"/>
+          </a:p>
+        </p:txBody>
+      </p:sp>
+      <p:sp>
+        <p:nvSpPr>
+          <p:cNvPr id="3" name="object 3"/>
           <p:cNvSpPr txBox="1"/>
           <p:nvPr/>
         </p:nvSpPr>
@@ -1298,7 +1372,7 @@
           </a:prstGeom>
         </p:spPr>
         <p:txBody>
-          <a:bodyPr wrap="square" lIns="0" tIns="12065" rIns="0" bIns="0" rtlCol="0" vert="horz">
+          <a:bodyPr vert="horz" wrap="square" lIns="0" tIns="12065" rIns="0" bIns="0" rtlCol="0">
             <a:spAutoFit/>
           </a:bodyPr>
           <a:lstStyle/>
@@ -1312,35 +1386,35 @@
               </a:spcBef>
             </a:pPr>
             <a:r>
-              <a:rPr dirty="0" sz="3350">
+              <a:rPr sz="3350" dirty="0">
                 <a:latin typeface="Microsoft Sans Serif"/>
                 <a:cs typeface="Microsoft Sans Serif"/>
               </a:rPr>
               <a:t>Базовые</a:t>
             </a:r>
             <a:r>
-              <a:rPr dirty="0" sz="3350" spc="-185">
-                <a:latin typeface="Microsoft Sans Serif"/>
-                <a:cs typeface="Microsoft Sans Serif"/>
-              </a:rPr>
-              <a:t> </a:t>
-            </a:r>
-            <a:r>
-              <a:rPr dirty="0" sz="3350" spc="-20">
+              <a:rPr sz="3350" spc="-185" dirty="0">
+                <a:latin typeface="Microsoft Sans Serif"/>
+                <a:cs typeface="Microsoft Sans Serif"/>
+              </a:rPr>
+              <a:t> </a:t>
+            </a:r>
+            <a:r>
+              <a:rPr sz="3350" spc="-20" dirty="0">
                 <a:latin typeface="Microsoft Sans Serif"/>
                 <a:cs typeface="Microsoft Sans Serif"/>
               </a:rPr>
               <a:t>структуры</a:t>
             </a:r>
             <a:r>
-              <a:rPr dirty="0" sz="3350" spc="-195">
-                <a:latin typeface="Microsoft Sans Serif"/>
-                <a:cs typeface="Microsoft Sans Serif"/>
-              </a:rPr>
-              <a:t> </a:t>
-            </a:r>
-            <a:r>
-              <a:rPr dirty="0" sz="3350" spc="-10">
+              <a:rPr sz="3350" spc="-195" dirty="0">
+                <a:latin typeface="Microsoft Sans Serif"/>
+                <a:cs typeface="Microsoft Sans Serif"/>
+              </a:rPr>
+              <a:t> </a:t>
+            </a:r>
+            <a:r>
+              <a:rPr sz="3350" spc="-10" dirty="0">
                 <a:latin typeface="Microsoft Sans Serif"/>
                 <a:cs typeface="Microsoft Sans Serif"/>
               </a:rPr>
@@ -1362,7 +1436,7 @@
 </file>
 
 <file path=ppt/slides/slide2.xml><?xml version="1.0" encoding="utf-8"?>
-<p:sld xmlns:a="http://schemas.openxmlformats.org/drawingml/2006/main" xmlns:r="http://schemas.openxmlformats.org/officeDocument/2006/relationships" xmlns:p="http://schemas.openxmlformats.org/presentationml/2006/main" showMasterSp="0">
+<p:sld xmlns:a="http://schemas.openxmlformats.org/drawingml/2006/main" xmlns:r="http://schemas.openxmlformats.org/officeDocument/2006/relationships" xmlns:p="http://schemas.openxmlformats.org/presentationml/2006/main">
   <p:cSld>
     <p:spTree>
       <p:nvGrpSpPr>
@@ -1380,366 +1454,212 @@
       </p:grpSpPr>
       <p:sp>
         <p:nvSpPr>
-          <p:cNvPr id="2" name="object 2"/>
-          <p:cNvSpPr txBox="1">
+          <p:cNvPr id="2" name="Title 1">
+            <a:extLst>
+              <a:ext uri="{FF2B5EF4-FFF2-40B4-BE49-F238E27FC236}">
+                <a16:creationId xmlns:a16="http://schemas.microsoft.com/office/drawing/2014/main" id="{B1EF3A38-450B-4D57-BAFD-CE388E20AE11}"/>
+              </a:ext>
+            </a:extLst>
+          </p:cNvPr>
+          <p:cNvSpPr>
             <a:spLocks noGrp="1"/>
           </p:cNvSpPr>
           <p:nvPr>
             <p:ph type="title"/>
           </p:nvPr>
         </p:nvSpPr>
-        <p:spPr>
-          <a:prstGeom prst="rect"/>
-        </p:spPr>
-        <p:txBody>
-          <a:bodyPr wrap="square" lIns="0" tIns="13335" rIns="0" bIns="0" rtlCol="0" vert="horz">
-            <a:spAutoFit/>
-          </a:bodyPr>
+        <p:spPr/>
+        <p:txBody>
+          <a:bodyPr/>
           <a:lstStyle/>
           <a:p>
-            <a:pPr marL="12700">
-              <a:lnSpc>
-                <a:spcPct val="100000"/>
-              </a:lnSpc>
-              <a:spcBef>
-                <a:spcPts val="105"/>
-              </a:spcBef>
-            </a:pPr>
-            <a:r>
-              <a:rPr dirty="0"/>
-              <a:t>Ветвления</a:t>
-            </a:r>
-            <a:r>
-              <a:rPr dirty="0" spc="-165"/>
-              <a:t> </a:t>
-            </a:r>
-            <a:r>
-              <a:rPr dirty="0"/>
-              <a:t>и</a:t>
-            </a:r>
-            <a:r>
-              <a:rPr dirty="0" spc="-165"/>
-              <a:t> </a:t>
-            </a:r>
-            <a:r>
-              <a:rPr dirty="0" spc="-10"/>
-              <a:t>циклы</a:t>
-            </a:r>
-          </a:p>
-        </p:txBody>
-      </p:sp>
-      <p:sp>
-        <p:nvSpPr>
-          <p:cNvPr id="3" name="object 3" descr=""/>
-          <p:cNvSpPr txBox="1"/>
-          <p:nvPr/>
+            <a:r>
+              <a:rPr lang="en-US" dirty="0"/>
+              <a:t>Hello world in C++</a:t>
+            </a:r>
+            <a:endParaRPr lang="ru-RU" dirty="0"/>
+          </a:p>
+        </p:txBody>
+      </p:sp>
+      <p:sp>
+        <p:nvSpPr>
+          <p:cNvPr id="3" name="Text Placeholder 2">
+            <a:extLst>
+              <a:ext uri="{FF2B5EF4-FFF2-40B4-BE49-F238E27FC236}">
+                <a16:creationId xmlns:a16="http://schemas.microsoft.com/office/drawing/2014/main" id="{1CEA1C0C-5992-4EEB-85D0-9E30F8041A95}"/>
+              </a:ext>
+            </a:extLst>
+          </p:cNvPr>
+          <p:cNvSpPr>
+            <a:spLocks noGrp="1"/>
+          </p:cNvSpPr>
+          <p:nvPr>
+            <p:ph type="body" idx="1"/>
+          </p:nvPr>
         </p:nvSpPr>
         <p:spPr>
           <a:xfrm>
-            <a:off x="870915" y="1749468"/>
-            <a:ext cx="3281045" cy="4346575"/>
+            <a:off x="870915" y="1750847"/>
+            <a:ext cx="10138410" cy="4308872"/>
           </a:xfrm>
-          <a:prstGeom prst="rect">
-            <a:avLst/>
-          </a:prstGeom>
         </p:spPr>
         <p:txBody>
-          <a:bodyPr wrap="square" lIns="0" tIns="88265" rIns="0" bIns="0" rtlCol="0" vert="horz">
-            <a:spAutoFit/>
-          </a:bodyPr>
+          <a:bodyPr/>
           <a:lstStyle/>
           <a:p>
-            <a:pPr marL="231140" indent="-218440">
-              <a:lnSpc>
-                <a:spcPct val="100000"/>
-              </a:lnSpc>
-              <a:spcBef>
-                <a:spcPts val="695"/>
-              </a:spcBef>
-              <a:buChar char="•"/>
-              <a:tabLst>
-                <a:tab pos="231140" algn="l"/>
-              </a:tabLst>
-            </a:pPr>
-            <a:r>
-              <a:rPr dirty="0" sz="2650" spc="-10">
-                <a:latin typeface="Microsoft Sans Serif"/>
-                <a:cs typeface="Microsoft Sans Serif"/>
-              </a:rPr>
-              <a:t>Ветвления:</a:t>
-            </a:r>
-            <a:endParaRPr sz="2650">
-              <a:latin typeface="Microsoft Sans Serif"/>
-              <a:cs typeface="Microsoft Sans Serif"/>
-            </a:endParaRPr>
-          </a:p>
-          <a:p>
-            <a:pPr lvl="1" marL="687705" indent="-217804">
-              <a:lnSpc>
-                <a:spcPct val="100000"/>
-              </a:lnSpc>
-              <a:spcBef>
-                <a:spcPts val="600"/>
-              </a:spcBef>
-              <a:buChar char="•"/>
-              <a:tabLst>
-                <a:tab pos="687705" algn="l"/>
-              </a:tabLst>
-            </a:pPr>
-            <a:r>
-              <a:rPr dirty="0" sz="2650">
-                <a:latin typeface="Microsoft Sans Serif"/>
-                <a:cs typeface="Microsoft Sans Serif"/>
-              </a:rPr>
-              <a:t>if,</a:t>
-            </a:r>
-            <a:r>
-              <a:rPr dirty="0" sz="2650" spc="10">
-                <a:latin typeface="Microsoft Sans Serif"/>
-                <a:cs typeface="Microsoft Sans Serif"/>
-              </a:rPr>
-              <a:t> </a:t>
-            </a:r>
-            <a:r>
-              <a:rPr dirty="0" sz="2650" spc="-20">
-                <a:latin typeface="Microsoft Sans Serif"/>
-                <a:cs typeface="Microsoft Sans Serif"/>
-              </a:rPr>
-              <a:t>else</a:t>
-            </a:r>
-            <a:endParaRPr sz="2650">
-              <a:latin typeface="Microsoft Sans Serif"/>
-              <a:cs typeface="Microsoft Sans Serif"/>
-            </a:endParaRPr>
-          </a:p>
-          <a:p>
-            <a:pPr lvl="1" marL="688340" indent="-218440">
-              <a:lnSpc>
-                <a:spcPct val="100000"/>
-              </a:lnSpc>
-              <a:spcBef>
-                <a:spcPts val="600"/>
-              </a:spcBef>
-              <a:buChar char="•"/>
-              <a:tabLst>
-                <a:tab pos="688340" algn="l"/>
-              </a:tabLst>
-            </a:pPr>
-            <a:r>
-              <a:rPr dirty="0" sz="2650" spc="-10">
-                <a:latin typeface="Microsoft Sans Serif"/>
-                <a:cs typeface="Microsoft Sans Serif"/>
-              </a:rPr>
-              <a:t>switch</a:t>
-            </a:r>
-            <a:endParaRPr sz="2650">
-              <a:latin typeface="Microsoft Sans Serif"/>
-              <a:cs typeface="Microsoft Sans Serif"/>
-            </a:endParaRPr>
-          </a:p>
-          <a:p>
-            <a:pPr lvl="1" marL="688340" indent="-218440">
-              <a:lnSpc>
-                <a:spcPct val="100000"/>
-              </a:lnSpc>
-              <a:spcBef>
-                <a:spcPts val="600"/>
-              </a:spcBef>
-              <a:buChar char="•"/>
-              <a:tabLst>
-                <a:tab pos="688340" algn="l"/>
-              </a:tabLst>
-            </a:pPr>
-            <a:r>
-              <a:rPr dirty="0" sz="2650" spc="-20">
-                <a:latin typeface="Microsoft Sans Serif"/>
-                <a:cs typeface="Microsoft Sans Serif"/>
-              </a:rPr>
-              <a:t>goto</a:t>
-            </a:r>
-            <a:endParaRPr sz="2650">
-              <a:latin typeface="Microsoft Sans Serif"/>
-              <a:cs typeface="Microsoft Sans Serif"/>
-            </a:endParaRPr>
-          </a:p>
-          <a:p>
-            <a:pPr algn="r" marL="217804" marR="1911985" indent="-217804">
-              <a:lnSpc>
-                <a:spcPct val="100000"/>
-              </a:lnSpc>
-              <a:spcBef>
-                <a:spcPts val="600"/>
-              </a:spcBef>
-              <a:buChar char="•"/>
-              <a:tabLst>
-                <a:tab pos="217804" algn="l"/>
-              </a:tabLst>
-            </a:pPr>
-            <a:r>
-              <a:rPr dirty="0" sz="2650" spc="-10">
-                <a:latin typeface="Microsoft Sans Serif"/>
-                <a:cs typeface="Microsoft Sans Serif"/>
-              </a:rPr>
-              <a:t>Циклы:</a:t>
-            </a:r>
-            <a:endParaRPr sz="2650">
-              <a:latin typeface="Microsoft Sans Serif"/>
-              <a:cs typeface="Microsoft Sans Serif"/>
-            </a:endParaRPr>
-          </a:p>
-          <a:p>
-            <a:pPr algn="r" lvl="1" marL="218440" marR="1818005" indent="-218440">
-              <a:lnSpc>
-                <a:spcPct val="100000"/>
-              </a:lnSpc>
-              <a:spcBef>
-                <a:spcPts val="605"/>
-              </a:spcBef>
-              <a:buChar char="•"/>
-              <a:tabLst>
-                <a:tab pos="218440" algn="l"/>
-              </a:tabLst>
-            </a:pPr>
-            <a:r>
-              <a:rPr dirty="0" sz="2650" spc="-10">
-                <a:latin typeface="Microsoft Sans Serif"/>
-                <a:cs typeface="Microsoft Sans Serif"/>
-              </a:rPr>
-              <a:t>while</a:t>
-            </a:r>
-            <a:endParaRPr sz="2650">
-              <a:latin typeface="Microsoft Sans Serif"/>
-              <a:cs typeface="Microsoft Sans Serif"/>
-            </a:endParaRPr>
-          </a:p>
-          <a:p>
-            <a:pPr lvl="1" marL="688340" indent="-218440">
-              <a:lnSpc>
-                <a:spcPct val="100000"/>
-              </a:lnSpc>
-              <a:spcBef>
-                <a:spcPts val="600"/>
-              </a:spcBef>
-              <a:buChar char="•"/>
-              <a:tabLst>
-                <a:tab pos="688340" algn="l"/>
-                <a:tab pos="1595755" algn="l"/>
-              </a:tabLst>
-            </a:pPr>
-            <a:r>
-              <a:rPr dirty="0" sz="2650">
-                <a:latin typeface="Microsoft Sans Serif"/>
-                <a:cs typeface="Microsoft Sans Serif"/>
-              </a:rPr>
-              <a:t>do</a:t>
-            </a:r>
-            <a:r>
-              <a:rPr dirty="0" sz="2650" spc="40">
-                <a:latin typeface="Microsoft Sans Serif"/>
-                <a:cs typeface="Microsoft Sans Serif"/>
-              </a:rPr>
-              <a:t> </a:t>
-            </a:r>
-            <a:r>
-              <a:rPr dirty="0" sz="2650" spc="-50">
-                <a:latin typeface="Microsoft Sans Serif"/>
-                <a:cs typeface="Microsoft Sans Serif"/>
-              </a:rPr>
-              <a:t>…</a:t>
-            </a:r>
-            <a:r>
-              <a:rPr dirty="0" sz="2650">
-                <a:latin typeface="Microsoft Sans Serif"/>
-                <a:cs typeface="Microsoft Sans Serif"/>
-              </a:rPr>
-              <a:t>	</a:t>
-            </a:r>
-            <a:r>
-              <a:rPr dirty="0" sz="2650" spc="-10">
-                <a:latin typeface="Microsoft Sans Serif"/>
-                <a:cs typeface="Microsoft Sans Serif"/>
-              </a:rPr>
-              <a:t>while</a:t>
-            </a:r>
-            <a:endParaRPr sz="2650">
-              <a:latin typeface="Microsoft Sans Serif"/>
-              <a:cs typeface="Microsoft Sans Serif"/>
-            </a:endParaRPr>
-          </a:p>
-          <a:p>
-            <a:pPr lvl="1" marL="687705" indent="-217804">
-              <a:lnSpc>
-                <a:spcPct val="100000"/>
-              </a:lnSpc>
-              <a:spcBef>
-                <a:spcPts val="600"/>
-              </a:spcBef>
-              <a:buChar char="•"/>
-              <a:tabLst>
-                <a:tab pos="687705" algn="l"/>
-              </a:tabLst>
-            </a:pPr>
-            <a:r>
-              <a:rPr dirty="0" sz="2650" spc="-25">
-                <a:latin typeface="Microsoft Sans Serif"/>
-                <a:cs typeface="Microsoft Sans Serif"/>
-              </a:rPr>
-              <a:t>for</a:t>
-            </a:r>
-            <a:endParaRPr sz="2650">
-              <a:latin typeface="Microsoft Sans Serif"/>
-              <a:cs typeface="Microsoft Sans Serif"/>
-            </a:endParaRPr>
-          </a:p>
-          <a:p>
-            <a:pPr lvl="1" marL="688340" indent="-218440">
-              <a:lnSpc>
-                <a:spcPct val="100000"/>
-              </a:lnSpc>
-              <a:spcBef>
-                <a:spcPts val="600"/>
-              </a:spcBef>
-              <a:buChar char="•"/>
-              <a:tabLst>
-                <a:tab pos="688340" algn="l"/>
-              </a:tabLst>
-            </a:pPr>
-            <a:r>
-              <a:rPr dirty="0" sz="2650" spc="-20">
-                <a:latin typeface="Microsoft Sans Serif"/>
-                <a:cs typeface="Microsoft Sans Serif"/>
-              </a:rPr>
-              <a:t>ranged-</a:t>
-            </a:r>
-            <a:r>
-              <a:rPr dirty="0" sz="2650">
-                <a:latin typeface="Microsoft Sans Serif"/>
-                <a:cs typeface="Microsoft Sans Serif"/>
-              </a:rPr>
-              <a:t>based</a:t>
-            </a:r>
-            <a:r>
-              <a:rPr dirty="0" sz="2650" spc="165">
-                <a:latin typeface="Microsoft Sans Serif"/>
-                <a:cs typeface="Microsoft Sans Serif"/>
-              </a:rPr>
-              <a:t> </a:t>
-            </a:r>
-            <a:r>
-              <a:rPr dirty="0" sz="2650" spc="-25">
-                <a:latin typeface="Microsoft Sans Serif"/>
-                <a:cs typeface="Microsoft Sans Serif"/>
-              </a:rPr>
-              <a:t>for</a:t>
-            </a:r>
-            <a:endParaRPr sz="2650">
-              <a:latin typeface="Microsoft Sans Serif"/>
-              <a:cs typeface="Microsoft Sans Serif"/>
-            </a:endParaRPr>
+            <a:pPr marL="514350" indent="-514350">
+              <a:buFont typeface="+mj-lt"/>
+              <a:buAutoNum type="arabicPeriod"/>
+            </a:pPr>
+            <a:r>
+              <a:rPr lang="en-US" b="1" dirty="0"/>
+              <a:t>#include &lt;iostream&gt; </a:t>
+            </a:r>
+            <a:r>
+              <a:rPr lang="ru-RU" dirty="0"/>
+              <a:t>- подключить библиотеку для работы с вводом </a:t>
+            </a:r>
+            <a:r>
+              <a:rPr lang="en-US" dirty="0"/>
+              <a:t>/ </a:t>
+            </a:r>
+            <a:r>
+              <a:rPr lang="ru-RU" dirty="0"/>
+              <a:t>выводом</a:t>
+            </a:r>
+          </a:p>
+          <a:p>
+            <a:pPr marL="514350" indent="-514350">
+              <a:buFont typeface="+mj-lt"/>
+              <a:buAutoNum type="arabicPeriod"/>
+            </a:pPr>
+            <a:r>
+              <a:rPr lang="en-US" b="1" dirty="0"/>
+              <a:t>int main() {…} </a:t>
+            </a:r>
+            <a:r>
+              <a:rPr lang="en-US" dirty="0"/>
+              <a:t>– </a:t>
+            </a:r>
+            <a:r>
+              <a:rPr lang="ru-RU" dirty="0"/>
+              <a:t>определение функции</a:t>
+            </a:r>
+            <a:endParaRPr lang="en-US" dirty="0"/>
+          </a:p>
+          <a:p>
+            <a:pPr marL="514350" indent="-514350">
+              <a:buFont typeface="+mj-lt"/>
+              <a:buAutoNum type="arabicPeriod"/>
+            </a:pPr>
+            <a:r>
+              <a:rPr lang="en-US" b="1" dirty="0"/>
+              <a:t>std::</a:t>
+            </a:r>
+            <a:r>
+              <a:rPr lang="en-US" b="1" dirty="0" err="1"/>
+              <a:t>cout</a:t>
+            </a:r>
+            <a:r>
+              <a:rPr lang="en-US" b="1" dirty="0"/>
+              <a:t> &lt;&lt; … </a:t>
+            </a:r>
+            <a:r>
+              <a:rPr lang="en-US" dirty="0"/>
+              <a:t>-</a:t>
+            </a:r>
+            <a:r>
+              <a:rPr lang="ru-RU" dirty="0"/>
+              <a:t> печать на экран</a:t>
+            </a:r>
+          </a:p>
+          <a:p>
+            <a:pPr marL="514350" indent="-514350">
+              <a:buFont typeface="+mj-lt"/>
+              <a:buAutoNum type="arabicPeriod"/>
+            </a:pPr>
+            <a:r>
+              <a:rPr lang="en-US" b="1" dirty="0"/>
+              <a:t>return 0 </a:t>
+            </a:r>
+            <a:r>
+              <a:rPr lang="en-US" dirty="0"/>
+              <a:t>– </a:t>
+            </a:r>
+            <a:r>
+              <a:rPr lang="ru-RU" dirty="0"/>
+              <a:t>передача возвращаемого значения (для </a:t>
+            </a:r>
+            <a:r>
+              <a:rPr lang="en-US" dirty="0"/>
+              <a:t>main </a:t>
+            </a:r>
+            <a:r>
+              <a:rPr lang="ru-RU" dirty="0"/>
+              <a:t>можно не писать, по умолчанию и так стоит </a:t>
+            </a:r>
+            <a:r>
+              <a:rPr lang="en-US" dirty="0"/>
+              <a:t>return 0</a:t>
+            </a:r>
+            <a:r>
+              <a:rPr lang="ru-RU" dirty="0"/>
+              <a:t>)</a:t>
+            </a:r>
+            <a:endParaRPr lang="en-US" dirty="0"/>
+          </a:p>
+          <a:p>
+            <a:pPr marL="514350" indent="-514350">
+              <a:buFont typeface="+mj-lt"/>
+              <a:buAutoNum type="arabicPeriod"/>
+            </a:pPr>
+            <a:r>
+              <a:rPr lang="en-US" b="1" dirty="0"/>
+              <a:t>using namespace std </a:t>
+            </a:r>
+            <a:r>
+              <a:rPr lang="en-US" dirty="0"/>
+              <a:t>– </a:t>
+            </a:r>
+            <a:r>
+              <a:rPr lang="ru-RU" dirty="0"/>
+              <a:t>позволяет видеть определения в </a:t>
+            </a:r>
+            <a:r>
+              <a:rPr lang="en-US" dirty="0"/>
+              <a:t>std (</a:t>
+            </a:r>
+            <a:r>
+              <a:rPr lang="ru-RU" dirty="0"/>
+              <a:t>не нужно явно писать </a:t>
+            </a:r>
+            <a:r>
+              <a:rPr lang="en-US" dirty="0"/>
+              <a:t>std::…)</a:t>
+            </a:r>
+          </a:p>
+          <a:p>
+            <a:pPr marL="514350" indent="-514350">
+              <a:buFont typeface="+mj-lt"/>
+              <a:buAutoNum type="arabicPeriod"/>
+            </a:pPr>
+            <a:endParaRPr lang="en-US" dirty="0"/>
+          </a:p>
+          <a:p>
+            <a:pPr marL="514350" indent="-514350">
+              <a:buFont typeface="+mj-lt"/>
+              <a:buAutoNum type="arabicPeriod"/>
+            </a:pPr>
+            <a:endParaRPr lang="ru-RU" dirty="0"/>
           </a:p>
         </p:txBody>
       </p:sp>
     </p:spTree>
+    <p:extLst>
+      <p:ext uri="{BB962C8B-B14F-4D97-AF65-F5344CB8AC3E}">
+        <p14:creationId xmlns:p14="http://schemas.microsoft.com/office/powerpoint/2010/main" val="66213411"/>
+      </p:ext>
+    </p:extLst>
   </p:cSld>
   <p:clrMapOvr>
     <a:masterClrMapping/>
@@ -1748,7 +1668,7 @@
 </file>
 
 <file path=ppt/slides/slide3.xml><?xml version="1.0" encoding="utf-8"?>
-<p:sld xmlns:a="http://schemas.openxmlformats.org/drawingml/2006/main" xmlns:r="http://schemas.openxmlformats.org/officeDocument/2006/relationships" xmlns:p="http://schemas.openxmlformats.org/presentationml/2006/main" showMasterSp="0">
+<p:sld xmlns:a="http://schemas.openxmlformats.org/drawingml/2006/main" xmlns:r="http://schemas.openxmlformats.org/officeDocument/2006/relationships" xmlns:p="http://schemas.openxmlformats.org/presentationml/2006/main">
   <p:cSld>
     <p:spTree>
       <p:nvGrpSpPr>
@@ -1766,8 +1686,14 @@
       </p:grpSpPr>
       <p:sp>
         <p:nvSpPr>
-          <p:cNvPr id="2" name="object 2"/>
-          <p:cNvSpPr txBox="1">
+          <p:cNvPr id="2" name="Title 1">
+            <a:extLst>
+              <a:ext uri="{FF2B5EF4-FFF2-40B4-BE49-F238E27FC236}">
+                <a16:creationId xmlns:a16="http://schemas.microsoft.com/office/drawing/2014/main" id="{ACAE111C-2F53-4D1E-BA9F-F1C95F852425}"/>
+              </a:ext>
+            </a:extLst>
+          </p:cNvPr>
+          <p:cNvSpPr>
             <a:spLocks noGrp="1"/>
           </p:cNvSpPr>
           <p:nvPr>
@@ -1775,33 +1701,32 @@
           </p:nvPr>
         </p:nvSpPr>
         <p:spPr>
-          <a:prstGeom prst="rect"/>
+          <a:xfrm>
+            <a:off x="870914" y="628599"/>
+            <a:ext cx="5987085" cy="1354217"/>
+          </a:xfrm>
         </p:spPr>
         <p:txBody>
-          <a:bodyPr wrap="square" lIns="0" tIns="13335" rIns="0" bIns="0" rtlCol="0" vert="horz">
-            <a:spAutoFit/>
-          </a:bodyPr>
+          <a:bodyPr/>
           <a:lstStyle/>
           <a:p>
-            <a:pPr marL="12700">
-              <a:lnSpc>
-                <a:spcPct val="100000"/>
-              </a:lnSpc>
-              <a:spcBef>
-                <a:spcPts val="105"/>
-              </a:spcBef>
-            </a:pPr>
-            <a:r>
-              <a:rPr dirty="0" spc="-10"/>
-              <a:t>std::vector</a:t>
-            </a:r>
-          </a:p>
-        </p:txBody>
-      </p:sp>
-      <p:sp>
-        <p:nvSpPr>
-          <p:cNvPr id="3" name="object 3" descr=""/>
-          <p:cNvSpPr txBox="1">
+            <a:r>
+              <a:rPr lang="ru-RU" dirty="0"/>
+              <a:t>Компиляция и запуск</a:t>
+            </a:r>
+          </a:p>
+        </p:txBody>
+      </p:sp>
+      <p:sp>
+        <p:nvSpPr>
+          <p:cNvPr id="3" name="Text Placeholder 2">
+            <a:extLst>
+              <a:ext uri="{FF2B5EF4-FFF2-40B4-BE49-F238E27FC236}">
+                <a16:creationId xmlns:a16="http://schemas.microsoft.com/office/drawing/2014/main" id="{544B4C4E-4AE1-4BBD-9624-2AF0CBF4CD75}"/>
+              </a:ext>
+            </a:extLst>
+          </p:cNvPr>
+          <p:cNvSpPr>
             <a:spLocks noGrp="1"/>
           </p:cNvSpPr>
           <p:nvPr>
@@ -1809,421 +1734,95 @@
           </p:nvPr>
         </p:nvSpPr>
         <p:spPr>
-          <a:prstGeom prst="rect"/>
+          <a:xfrm>
+            <a:off x="870915" y="1750847"/>
+            <a:ext cx="10138410" cy="3447098"/>
+          </a:xfrm>
         </p:spPr>
         <p:txBody>
-          <a:bodyPr wrap="square" lIns="0" tIns="76835" rIns="0" bIns="0" rtlCol="0" vert="horz">
-            <a:spAutoFit/>
-          </a:bodyPr>
+          <a:bodyPr/>
           <a:lstStyle/>
           <a:p>
-            <a:pPr marL="242570" indent="-229870">
-              <a:lnSpc>
-                <a:spcPct val="100000"/>
-              </a:lnSpc>
-              <a:spcBef>
-                <a:spcPts val="605"/>
-              </a:spcBef>
-              <a:buChar char="•"/>
-              <a:tabLst>
-                <a:tab pos="242570" algn="l"/>
-              </a:tabLst>
-            </a:pPr>
-            <a:r>
-              <a:rPr dirty="0" spc="-55"/>
-              <a:t>Динамический</a:t>
-            </a:r>
-            <a:r>
-              <a:rPr dirty="0" spc="-110"/>
-              <a:t> </a:t>
-            </a:r>
-            <a:r>
-              <a:rPr dirty="0" spc="-10"/>
-              <a:t>массив</a:t>
-            </a:r>
-          </a:p>
-          <a:p>
-            <a:pPr marL="242570" indent="-229870">
-              <a:lnSpc>
-                <a:spcPct val="100000"/>
-              </a:lnSpc>
-              <a:spcBef>
-                <a:spcPts val="500"/>
-              </a:spcBef>
-              <a:buChar char="•"/>
-              <a:tabLst>
-                <a:tab pos="242570" algn="l"/>
-              </a:tabLst>
-            </a:pPr>
-            <a:r>
-              <a:rPr dirty="0"/>
-              <a:t>size()</a:t>
-            </a:r>
-            <a:r>
-              <a:rPr dirty="0" spc="-110"/>
-              <a:t> </a:t>
-            </a:r>
-            <a:r>
-              <a:rPr dirty="0"/>
-              <a:t>-</a:t>
-            </a:r>
-            <a:r>
-              <a:rPr dirty="0" spc="-95"/>
-              <a:t> </a:t>
-            </a:r>
-            <a:r>
-              <a:rPr dirty="0" spc="-20"/>
-              <a:t>размер</a:t>
-            </a:r>
-            <a:r>
-              <a:rPr dirty="0" spc="-90"/>
-              <a:t> </a:t>
-            </a:r>
-            <a:r>
-              <a:rPr dirty="0" spc="-10"/>
-              <a:t>массива</a:t>
-            </a:r>
-          </a:p>
-          <a:p>
-            <a:pPr marL="242570" indent="-229870">
-              <a:lnSpc>
-                <a:spcPct val="100000"/>
-              </a:lnSpc>
-              <a:spcBef>
-                <a:spcPts val="495"/>
-              </a:spcBef>
-              <a:buChar char="•"/>
-              <a:tabLst>
-                <a:tab pos="242570" algn="l"/>
-              </a:tabLst>
-            </a:pPr>
-            <a:r>
-              <a:rPr dirty="0"/>
-              <a:t>capacity()</a:t>
-            </a:r>
-            <a:r>
-              <a:rPr dirty="0" spc="-125"/>
-              <a:t> </a:t>
-            </a:r>
-            <a:r>
-              <a:rPr dirty="0"/>
-              <a:t>-</a:t>
-            </a:r>
-            <a:r>
-              <a:rPr dirty="0" spc="-125"/>
-              <a:t> </a:t>
-            </a:r>
-            <a:r>
-              <a:rPr dirty="0" spc="-20"/>
-              <a:t>вместимость</a:t>
-            </a:r>
-            <a:r>
-              <a:rPr dirty="0" spc="-110"/>
-              <a:t> </a:t>
-            </a:r>
-            <a:r>
-              <a:rPr dirty="0" spc="-10"/>
-              <a:t>массива</a:t>
-            </a:r>
-          </a:p>
-          <a:p>
-            <a:pPr marL="242570" indent="-229870">
-              <a:lnSpc>
-                <a:spcPct val="100000"/>
-              </a:lnSpc>
-              <a:spcBef>
-                <a:spcPts val="505"/>
-              </a:spcBef>
-              <a:buChar char="•"/>
-              <a:tabLst>
-                <a:tab pos="242570" algn="l"/>
-              </a:tabLst>
-            </a:pPr>
-            <a:r>
-              <a:rPr dirty="0"/>
-              <a:t>push_back()</a:t>
-            </a:r>
-            <a:r>
-              <a:rPr dirty="0" spc="-150"/>
-              <a:t> </a:t>
-            </a:r>
-            <a:r>
-              <a:rPr dirty="0"/>
-              <a:t>-</a:t>
-            </a:r>
-            <a:r>
-              <a:rPr dirty="0" spc="-135"/>
-              <a:t> </a:t>
-            </a:r>
-            <a:r>
-              <a:rPr dirty="0"/>
-              <a:t>добавить</a:t>
-            </a:r>
-            <a:r>
-              <a:rPr dirty="0" spc="-145"/>
-              <a:t> </a:t>
-            </a:r>
-            <a:r>
-              <a:rPr dirty="0"/>
-              <a:t>элемент</a:t>
-            </a:r>
-            <a:r>
-              <a:rPr dirty="0" spc="-120"/>
-              <a:t> </a:t>
-            </a:r>
-            <a:r>
-              <a:rPr dirty="0"/>
-              <a:t>в</a:t>
-            </a:r>
-            <a:r>
-              <a:rPr dirty="0" spc="-145"/>
-              <a:t> </a:t>
-            </a:r>
-            <a:r>
-              <a:rPr dirty="0"/>
-              <a:t>конец</a:t>
-            </a:r>
-            <a:r>
-              <a:rPr dirty="0" spc="-150"/>
-              <a:t> </a:t>
-            </a:r>
-            <a:r>
-              <a:rPr dirty="0" spc="-10"/>
-              <a:t>массива</a:t>
-            </a:r>
-          </a:p>
-          <a:p>
-            <a:pPr marL="242570" indent="-229870">
-              <a:lnSpc>
-                <a:spcPct val="100000"/>
-              </a:lnSpc>
-              <a:spcBef>
-                <a:spcPts val="505"/>
-              </a:spcBef>
-              <a:buChar char="•"/>
-              <a:tabLst>
-                <a:tab pos="242570" algn="l"/>
-              </a:tabLst>
-            </a:pPr>
-            <a:r>
-              <a:rPr dirty="0"/>
-              <a:t>pop_back()</a:t>
-            </a:r>
-            <a:r>
-              <a:rPr dirty="0" spc="-125"/>
-              <a:t> </a:t>
-            </a:r>
-            <a:r>
-              <a:rPr dirty="0"/>
-              <a:t>-</a:t>
-            </a:r>
-            <a:r>
-              <a:rPr dirty="0" spc="-140"/>
-              <a:t> </a:t>
-            </a:r>
-            <a:r>
-              <a:rPr dirty="0" spc="-25"/>
-              <a:t>извлечь</a:t>
-            </a:r>
-            <a:r>
-              <a:rPr dirty="0" spc="-160"/>
-              <a:t> </a:t>
-            </a:r>
-            <a:r>
-              <a:rPr dirty="0"/>
-              <a:t>элемент</a:t>
-            </a:r>
-            <a:r>
-              <a:rPr dirty="0" spc="-114"/>
-              <a:t> </a:t>
-            </a:r>
-            <a:r>
-              <a:rPr dirty="0"/>
-              <a:t>с</a:t>
-            </a:r>
-            <a:r>
-              <a:rPr dirty="0" spc="-140"/>
-              <a:t> </a:t>
-            </a:r>
-            <a:r>
-              <a:rPr dirty="0"/>
-              <a:t>конца</a:t>
-            </a:r>
-            <a:r>
-              <a:rPr dirty="0" spc="-125"/>
-              <a:t> </a:t>
-            </a:r>
-            <a:r>
-              <a:rPr dirty="0" spc="-10"/>
-              <a:t>массива</a:t>
-            </a:r>
-          </a:p>
-          <a:p>
-            <a:pPr marL="241300" marR="5080" indent="-228600">
-              <a:lnSpc>
-                <a:spcPts val="2890"/>
-              </a:lnSpc>
-              <a:spcBef>
-                <a:spcPts val="1030"/>
-              </a:spcBef>
-              <a:buChar char="•"/>
-              <a:tabLst>
-                <a:tab pos="241300" algn="l"/>
-              </a:tabLst>
-            </a:pPr>
-            <a:r>
-              <a:rPr dirty="0"/>
-              <a:t>front()</a:t>
-            </a:r>
-            <a:r>
-              <a:rPr dirty="0" spc="-105"/>
-              <a:t> </a:t>
-            </a:r>
-            <a:r>
-              <a:rPr dirty="0"/>
-              <a:t>/</a:t>
-            </a:r>
-            <a:r>
-              <a:rPr dirty="0" spc="-110"/>
-              <a:t> </a:t>
-            </a:r>
-            <a:r>
-              <a:rPr dirty="0"/>
-              <a:t>back()</a:t>
-            </a:r>
-            <a:r>
-              <a:rPr dirty="0" spc="-90"/>
-              <a:t> </a:t>
-            </a:r>
-            <a:r>
-              <a:rPr dirty="0"/>
-              <a:t>-</a:t>
-            </a:r>
-            <a:r>
-              <a:rPr dirty="0" spc="-110"/>
-              <a:t> </a:t>
-            </a:r>
-            <a:r>
-              <a:rPr dirty="0"/>
-              <a:t>обращение</a:t>
-            </a:r>
-            <a:r>
-              <a:rPr dirty="0" spc="-70"/>
-              <a:t> </a:t>
-            </a:r>
-            <a:r>
-              <a:rPr dirty="0"/>
-              <a:t>к</a:t>
-            </a:r>
-            <a:r>
-              <a:rPr dirty="0" spc="-110"/>
-              <a:t> </a:t>
-            </a:r>
-            <a:r>
-              <a:rPr dirty="0" spc="-30"/>
-              <a:t>первому/последнему</a:t>
-            </a:r>
-            <a:r>
-              <a:rPr dirty="0" spc="-65"/>
-              <a:t> </a:t>
-            </a:r>
-            <a:r>
-              <a:rPr dirty="0" spc="-10"/>
-              <a:t>элементу массива</a:t>
-            </a:r>
-          </a:p>
-          <a:p>
-            <a:pPr marL="242570" indent="-229870">
-              <a:lnSpc>
-                <a:spcPct val="100000"/>
-              </a:lnSpc>
-              <a:spcBef>
-                <a:spcPts val="489"/>
-              </a:spcBef>
-              <a:buChar char="•"/>
-              <a:tabLst>
-                <a:tab pos="242570" algn="l"/>
-              </a:tabLst>
-            </a:pPr>
-            <a:r>
-              <a:rPr dirty="0"/>
-              <a:t>data()</a:t>
-            </a:r>
-            <a:r>
-              <a:rPr dirty="0" spc="-100"/>
-              <a:t> </a:t>
-            </a:r>
-            <a:r>
-              <a:rPr dirty="0"/>
-              <a:t>-</a:t>
-            </a:r>
-            <a:r>
-              <a:rPr dirty="0" spc="-100"/>
-              <a:t> </a:t>
-            </a:r>
-            <a:r>
-              <a:rPr dirty="0" spc="-50"/>
-              <a:t>указатель</a:t>
-            </a:r>
-            <a:r>
-              <a:rPr dirty="0" spc="-135"/>
-              <a:t> </a:t>
-            </a:r>
-            <a:r>
-              <a:rPr dirty="0"/>
-              <a:t>на</a:t>
-            </a:r>
-            <a:r>
-              <a:rPr dirty="0" spc="-100"/>
-              <a:t> </a:t>
-            </a:r>
-            <a:r>
-              <a:rPr dirty="0"/>
-              <a:t>элементы</a:t>
-            </a:r>
-            <a:r>
-              <a:rPr dirty="0" spc="-80"/>
-              <a:t> </a:t>
-            </a:r>
-            <a:r>
-              <a:rPr dirty="0" spc="-10"/>
-              <a:t>массива</a:t>
-            </a:r>
-          </a:p>
-          <a:p>
-            <a:pPr marL="242570" indent="-229870">
-              <a:lnSpc>
-                <a:spcPct val="100000"/>
-              </a:lnSpc>
-              <a:spcBef>
-                <a:spcPts val="500"/>
-              </a:spcBef>
-              <a:buClr>
-                <a:srgbClr val="000000"/>
-              </a:buClr>
-              <a:buChar char="•"/>
-              <a:tabLst>
-                <a:tab pos="242570" algn="l"/>
-              </a:tabLst>
-            </a:pPr>
-            <a:r>
-              <a:rPr dirty="0" u="sng" spc="-10">
-                <a:solidFill>
-                  <a:srgbClr val="0462C1"/>
-                </a:solidFill>
-                <a:uFill>
-                  <a:solidFill>
-                    <a:srgbClr val="0462C1"/>
-                  </a:solidFill>
-                </a:uFill>
-                <a:hlinkClick r:id="rId2"/>
-              </a:rPr>
-              <a:t>cppreference</a:t>
-            </a:r>
+            <a:pPr>
+              <a:defRPr/>
+            </a:pPr>
+            <a:r>
+              <a:rPr lang="ru-RU" sz="2800" dirty="0"/>
+              <a:t>$ g++ main.cpp – компиляция программы</a:t>
+            </a:r>
+          </a:p>
+          <a:p>
+            <a:pPr>
+              <a:defRPr/>
+            </a:pPr>
+            <a:r>
+              <a:rPr lang="ru-RU" sz="2800" dirty="0"/>
+              <a:t>$ g++ main.cpp -o </a:t>
+            </a:r>
+            <a:r>
+              <a:rPr lang="ru-RU" sz="2800" dirty="0" err="1"/>
+              <a:t>program</a:t>
+            </a:r>
+            <a:r>
+              <a:rPr lang="ru-RU" sz="2800" dirty="0"/>
+              <a:t> – скомпилировать программу и назвать исполняемый файл (по умолчанию </a:t>
+            </a:r>
+            <a:r>
+              <a:rPr lang="ru-RU" sz="2800" dirty="0" err="1"/>
+              <a:t>a.out</a:t>
+            </a:r>
+            <a:r>
+              <a:rPr lang="ru-RU" sz="2800" dirty="0"/>
+              <a:t>)</a:t>
+            </a:r>
+          </a:p>
+          <a:p>
+            <a:pPr>
+              <a:defRPr/>
+            </a:pPr>
+            <a:r>
+              <a:rPr lang="ru-RU" sz="2800" dirty="0"/>
+              <a:t>$ ./</a:t>
+            </a:r>
+            <a:r>
+              <a:rPr lang="ru-RU" sz="2800" dirty="0" err="1"/>
+              <a:t>program</a:t>
+            </a:r>
+            <a:r>
+              <a:rPr lang="ru-RU" sz="2800" dirty="0"/>
+              <a:t> – запустить программу</a:t>
+            </a:r>
+          </a:p>
+          <a:p>
+            <a:pPr marL="0" indent="0">
+              <a:buFont typeface="Arial"/>
+              <a:buNone/>
+              <a:defRPr/>
+            </a:pPr>
+            <a:endParaRPr lang="ru-RU" dirty="0"/>
+          </a:p>
+          <a:p>
+            <a:pPr marL="0" indent="0">
+              <a:buFont typeface="Arial"/>
+              <a:buNone/>
+              <a:defRPr/>
+            </a:pPr>
+            <a:r>
+              <a:rPr lang="ru-RU" dirty="0"/>
+              <a:t>$ python3 – запустить интерпретатор питона в интерактивном режиме</a:t>
+            </a:r>
+          </a:p>
+          <a:p>
+            <a:endParaRPr lang="ru-RU" dirty="0"/>
           </a:p>
         </p:txBody>
       </p:sp>
     </p:spTree>
+    <p:extLst>
+      <p:ext uri="{BB962C8B-B14F-4D97-AF65-F5344CB8AC3E}">
+        <p14:creationId xmlns:p14="http://schemas.microsoft.com/office/powerpoint/2010/main" val="130559793"/>
+      </p:ext>
+    </p:extLst>
   </p:cSld>
   <p:clrMapOvr>
     <a:masterClrMapping/>
@@ -2259,10 +1858,12 @@
           </p:nvPr>
         </p:nvSpPr>
         <p:spPr>
-          <a:prstGeom prst="rect"/>
+          <a:prstGeom prst="rect">
+            <a:avLst/>
+          </a:prstGeom>
         </p:spPr>
         <p:txBody>
-          <a:bodyPr wrap="square" lIns="0" tIns="13335" rIns="0" bIns="0" rtlCol="0" vert="horz">
+          <a:bodyPr vert="horz" wrap="square" lIns="0" tIns="13335" rIns="0" bIns="0" rtlCol="0">
             <a:spAutoFit/>
           </a:bodyPr>
           <a:lstStyle/>
@@ -2276,29 +1877,417 @@
               </a:spcBef>
             </a:pPr>
             <a:r>
-              <a:rPr dirty="0" spc="-10"/>
-              <a:t>std::string</a:t>
-            </a:r>
-          </a:p>
-        </p:txBody>
-      </p:sp>
-      <p:sp>
-        <p:nvSpPr>
-          <p:cNvPr id="3" name="object 3" descr=""/>
+              <a:rPr dirty="0"/>
+              <a:t>Ветвления</a:t>
+            </a:r>
+            <a:r>
+              <a:rPr spc="-165" dirty="0"/>
+              <a:t> </a:t>
+            </a:r>
+            <a:r>
+              <a:rPr dirty="0"/>
+              <a:t>и</a:t>
+            </a:r>
+            <a:r>
+              <a:rPr spc="-165" dirty="0"/>
+              <a:t> </a:t>
+            </a:r>
+            <a:r>
+              <a:rPr spc="-10" dirty="0"/>
+              <a:t>циклы</a:t>
+            </a:r>
+          </a:p>
+        </p:txBody>
+      </p:sp>
+      <p:sp>
+        <p:nvSpPr>
+          <p:cNvPr id="3" name="object 3"/>
           <p:cNvSpPr txBox="1"/>
           <p:nvPr/>
         </p:nvSpPr>
         <p:spPr>
           <a:xfrm>
-            <a:off x="870915" y="1750847"/>
-            <a:ext cx="9279890" cy="4322445"/>
+            <a:off x="870915" y="1749468"/>
+            <a:ext cx="3281045" cy="4346575"/>
           </a:xfrm>
           <a:prstGeom prst="rect">
             <a:avLst/>
           </a:prstGeom>
         </p:spPr>
         <p:txBody>
-          <a:bodyPr wrap="square" lIns="0" tIns="76835" rIns="0" bIns="0" rtlCol="0" vert="horz">
+          <a:bodyPr vert="horz" wrap="square" lIns="0" tIns="88265" rIns="0" bIns="0" rtlCol="0">
+            <a:spAutoFit/>
+          </a:bodyPr>
+          <a:lstStyle/>
+          <a:p>
+            <a:pPr marL="231140" indent="-218440">
+              <a:lnSpc>
+                <a:spcPct val="100000"/>
+              </a:lnSpc>
+              <a:spcBef>
+                <a:spcPts val="695"/>
+              </a:spcBef>
+              <a:buChar char="•"/>
+              <a:tabLst>
+                <a:tab pos="231140" algn="l"/>
+              </a:tabLst>
+            </a:pPr>
+            <a:r>
+              <a:rPr sz="2650" spc="-10" dirty="0">
+                <a:latin typeface="Microsoft Sans Serif"/>
+                <a:cs typeface="Microsoft Sans Serif"/>
+              </a:rPr>
+              <a:t>Ветвления:</a:t>
+            </a:r>
+            <a:endParaRPr sz="2650">
+              <a:latin typeface="Microsoft Sans Serif"/>
+              <a:cs typeface="Microsoft Sans Serif"/>
+            </a:endParaRPr>
+          </a:p>
+          <a:p>
+            <a:pPr marL="687705" lvl="1" indent="-217804">
+              <a:lnSpc>
+                <a:spcPct val="100000"/>
+              </a:lnSpc>
+              <a:spcBef>
+                <a:spcPts val="600"/>
+              </a:spcBef>
+              <a:buChar char="•"/>
+              <a:tabLst>
+                <a:tab pos="687705" algn="l"/>
+              </a:tabLst>
+            </a:pPr>
+            <a:r>
+              <a:rPr sz="2650" dirty="0">
+                <a:latin typeface="Microsoft Sans Serif"/>
+                <a:cs typeface="Microsoft Sans Serif"/>
+              </a:rPr>
+              <a:t>if,</a:t>
+            </a:r>
+            <a:r>
+              <a:rPr sz="2650" spc="10" dirty="0">
+                <a:latin typeface="Microsoft Sans Serif"/>
+                <a:cs typeface="Microsoft Sans Serif"/>
+              </a:rPr>
+              <a:t> </a:t>
+            </a:r>
+            <a:r>
+              <a:rPr sz="2650" spc="-20" dirty="0">
+                <a:latin typeface="Microsoft Sans Serif"/>
+                <a:cs typeface="Microsoft Sans Serif"/>
+              </a:rPr>
+              <a:t>else</a:t>
+            </a:r>
+            <a:endParaRPr sz="2650">
+              <a:latin typeface="Microsoft Sans Serif"/>
+              <a:cs typeface="Microsoft Sans Serif"/>
+            </a:endParaRPr>
+          </a:p>
+          <a:p>
+            <a:pPr marL="688340" lvl="1" indent="-218440">
+              <a:lnSpc>
+                <a:spcPct val="100000"/>
+              </a:lnSpc>
+              <a:spcBef>
+                <a:spcPts val="600"/>
+              </a:spcBef>
+              <a:buChar char="•"/>
+              <a:tabLst>
+                <a:tab pos="688340" algn="l"/>
+              </a:tabLst>
+            </a:pPr>
+            <a:r>
+              <a:rPr sz="2650" spc="-10" dirty="0">
+                <a:latin typeface="Microsoft Sans Serif"/>
+                <a:cs typeface="Microsoft Sans Serif"/>
+              </a:rPr>
+              <a:t>switch</a:t>
+            </a:r>
+            <a:endParaRPr sz="2650">
+              <a:latin typeface="Microsoft Sans Serif"/>
+              <a:cs typeface="Microsoft Sans Serif"/>
+            </a:endParaRPr>
+          </a:p>
+          <a:p>
+            <a:pPr marL="688340" lvl="1" indent="-218440">
+              <a:lnSpc>
+                <a:spcPct val="100000"/>
+              </a:lnSpc>
+              <a:spcBef>
+                <a:spcPts val="600"/>
+              </a:spcBef>
+              <a:buChar char="•"/>
+              <a:tabLst>
+                <a:tab pos="688340" algn="l"/>
+              </a:tabLst>
+            </a:pPr>
+            <a:r>
+              <a:rPr sz="2650" spc="-20" dirty="0">
+                <a:latin typeface="Microsoft Sans Serif"/>
+                <a:cs typeface="Microsoft Sans Serif"/>
+              </a:rPr>
+              <a:t>goto</a:t>
+            </a:r>
+            <a:endParaRPr sz="2650">
+              <a:latin typeface="Microsoft Sans Serif"/>
+              <a:cs typeface="Microsoft Sans Serif"/>
+            </a:endParaRPr>
+          </a:p>
+          <a:p>
+            <a:pPr marL="217804" marR="1911985" indent="-217804" algn="r">
+              <a:lnSpc>
+                <a:spcPct val="100000"/>
+              </a:lnSpc>
+              <a:spcBef>
+                <a:spcPts val="600"/>
+              </a:spcBef>
+              <a:buChar char="•"/>
+              <a:tabLst>
+                <a:tab pos="217804" algn="l"/>
+              </a:tabLst>
+            </a:pPr>
+            <a:r>
+              <a:rPr sz="2650" spc="-10" dirty="0">
+                <a:latin typeface="Microsoft Sans Serif"/>
+                <a:cs typeface="Microsoft Sans Serif"/>
+              </a:rPr>
+              <a:t>Циклы:</a:t>
+            </a:r>
+            <a:endParaRPr sz="2650">
+              <a:latin typeface="Microsoft Sans Serif"/>
+              <a:cs typeface="Microsoft Sans Serif"/>
+            </a:endParaRPr>
+          </a:p>
+          <a:p>
+            <a:pPr marL="218440" marR="1818005" lvl="1" indent="-218440" algn="r">
+              <a:lnSpc>
+                <a:spcPct val="100000"/>
+              </a:lnSpc>
+              <a:spcBef>
+                <a:spcPts val="605"/>
+              </a:spcBef>
+              <a:buChar char="•"/>
+              <a:tabLst>
+                <a:tab pos="218440" algn="l"/>
+              </a:tabLst>
+            </a:pPr>
+            <a:r>
+              <a:rPr sz="2650" spc="-10" dirty="0">
+                <a:latin typeface="Microsoft Sans Serif"/>
+                <a:cs typeface="Microsoft Sans Serif"/>
+              </a:rPr>
+              <a:t>while</a:t>
+            </a:r>
+            <a:endParaRPr sz="2650">
+              <a:latin typeface="Microsoft Sans Serif"/>
+              <a:cs typeface="Microsoft Sans Serif"/>
+            </a:endParaRPr>
+          </a:p>
+          <a:p>
+            <a:pPr marL="688340" lvl="1" indent="-218440">
+              <a:lnSpc>
+                <a:spcPct val="100000"/>
+              </a:lnSpc>
+              <a:spcBef>
+                <a:spcPts val="600"/>
+              </a:spcBef>
+              <a:buChar char="•"/>
+              <a:tabLst>
+                <a:tab pos="688340" algn="l"/>
+                <a:tab pos="1595755" algn="l"/>
+              </a:tabLst>
+            </a:pPr>
+            <a:r>
+              <a:rPr sz="2650" dirty="0">
+                <a:latin typeface="Microsoft Sans Serif"/>
+                <a:cs typeface="Microsoft Sans Serif"/>
+              </a:rPr>
+              <a:t>do</a:t>
+            </a:r>
+            <a:r>
+              <a:rPr sz="2650" spc="40" dirty="0">
+                <a:latin typeface="Microsoft Sans Serif"/>
+                <a:cs typeface="Microsoft Sans Serif"/>
+              </a:rPr>
+              <a:t> </a:t>
+            </a:r>
+            <a:r>
+              <a:rPr sz="2650" spc="-50" dirty="0">
+                <a:latin typeface="Microsoft Sans Serif"/>
+                <a:cs typeface="Microsoft Sans Serif"/>
+              </a:rPr>
+              <a:t>…</a:t>
+            </a:r>
+            <a:r>
+              <a:rPr sz="2650" dirty="0">
+                <a:latin typeface="Microsoft Sans Serif"/>
+                <a:cs typeface="Microsoft Sans Serif"/>
+              </a:rPr>
+              <a:t>	</a:t>
+            </a:r>
+            <a:r>
+              <a:rPr sz="2650" spc="-10" dirty="0">
+                <a:latin typeface="Microsoft Sans Serif"/>
+                <a:cs typeface="Microsoft Sans Serif"/>
+              </a:rPr>
+              <a:t>while</a:t>
+            </a:r>
+            <a:endParaRPr sz="2650">
+              <a:latin typeface="Microsoft Sans Serif"/>
+              <a:cs typeface="Microsoft Sans Serif"/>
+            </a:endParaRPr>
+          </a:p>
+          <a:p>
+            <a:pPr marL="687705" lvl="1" indent="-217804">
+              <a:lnSpc>
+                <a:spcPct val="100000"/>
+              </a:lnSpc>
+              <a:spcBef>
+                <a:spcPts val="600"/>
+              </a:spcBef>
+              <a:buChar char="•"/>
+              <a:tabLst>
+                <a:tab pos="687705" algn="l"/>
+              </a:tabLst>
+            </a:pPr>
+            <a:r>
+              <a:rPr sz="2650" spc="-25" dirty="0">
+                <a:latin typeface="Microsoft Sans Serif"/>
+                <a:cs typeface="Microsoft Sans Serif"/>
+              </a:rPr>
+              <a:t>for</a:t>
+            </a:r>
+            <a:endParaRPr sz="2650">
+              <a:latin typeface="Microsoft Sans Serif"/>
+              <a:cs typeface="Microsoft Sans Serif"/>
+            </a:endParaRPr>
+          </a:p>
+          <a:p>
+            <a:pPr marL="688340" lvl="1" indent="-218440">
+              <a:lnSpc>
+                <a:spcPct val="100000"/>
+              </a:lnSpc>
+              <a:spcBef>
+                <a:spcPts val="600"/>
+              </a:spcBef>
+              <a:buChar char="•"/>
+              <a:tabLst>
+                <a:tab pos="688340" algn="l"/>
+              </a:tabLst>
+            </a:pPr>
+            <a:r>
+              <a:rPr sz="2650" spc="-20" dirty="0">
+                <a:latin typeface="Microsoft Sans Serif"/>
+                <a:cs typeface="Microsoft Sans Serif"/>
+              </a:rPr>
+              <a:t>ranged-</a:t>
+            </a:r>
+            <a:r>
+              <a:rPr sz="2650" dirty="0">
+                <a:latin typeface="Microsoft Sans Serif"/>
+                <a:cs typeface="Microsoft Sans Serif"/>
+              </a:rPr>
+              <a:t>based</a:t>
+            </a:r>
+            <a:r>
+              <a:rPr sz="2650" spc="165" dirty="0">
+                <a:latin typeface="Microsoft Sans Serif"/>
+                <a:cs typeface="Microsoft Sans Serif"/>
+              </a:rPr>
+              <a:t> </a:t>
+            </a:r>
+            <a:r>
+              <a:rPr sz="2650" spc="-25" dirty="0">
+                <a:latin typeface="Microsoft Sans Serif"/>
+                <a:cs typeface="Microsoft Sans Serif"/>
+              </a:rPr>
+              <a:t>for</a:t>
+            </a:r>
+            <a:endParaRPr sz="2650">
+              <a:latin typeface="Microsoft Sans Serif"/>
+              <a:cs typeface="Microsoft Sans Serif"/>
+            </a:endParaRPr>
+          </a:p>
+        </p:txBody>
+      </p:sp>
+    </p:spTree>
+  </p:cSld>
+  <p:clrMapOvr>
+    <a:masterClrMapping/>
+  </p:clrMapOvr>
+</p:sld>
+</file>
+
+<file path=ppt/slides/slide5.xml><?xml version="1.0" encoding="utf-8"?>
+<p:sld xmlns:a="http://schemas.openxmlformats.org/drawingml/2006/main" xmlns:r="http://schemas.openxmlformats.org/officeDocument/2006/relationships" xmlns:p="http://schemas.openxmlformats.org/presentationml/2006/main" showMasterSp="0">
+  <p:cSld>
+    <p:spTree>
+      <p:nvGrpSpPr>
+        <p:cNvPr id="1" name=""/>
+        <p:cNvGrpSpPr/>
+        <p:nvPr/>
+      </p:nvGrpSpPr>
+      <p:grpSpPr>
+        <a:xfrm>
+          <a:off x="0" y="0"/>
+          <a:ext cx="0" cy="0"/>
+          <a:chOff x="0" y="0"/>
+          <a:chExt cx="0" cy="0"/>
+        </a:xfrm>
+      </p:grpSpPr>
+      <p:sp>
+        <p:nvSpPr>
+          <p:cNvPr id="2" name="object 2"/>
+          <p:cNvSpPr txBox="1">
+            <a:spLocks noGrp="1"/>
+          </p:cNvSpPr>
+          <p:nvPr>
+            <p:ph type="title"/>
+          </p:nvPr>
+        </p:nvSpPr>
+        <p:spPr>
+          <a:prstGeom prst="rect">
+            <a:avLst/>
+          </a:prstGeom>
+        </p:spPr>
+        <p:txBody>
+          <a:bodyPr vert="horz" wrap="square" lIns="0" tIns="13335" rIns="0" bIns="0" rtlCol="0">
+            <a:spAutoFit/>
+          </a:bodyPr>
+          <a:lstStyle/>
+          <a:p>
+            <a:pPr marL="12700">
+              <a:lnSpc>
+                <a:spcPct val="100000"/>
+              </a:lnSpc>
+              <a:spcBef>
+                <a:spcPts val="105"/>
+              </a:spcBef>
+            </a:pPr>
+            <a:r>
+              <a:rPr spc="-10" dirty="0"/>
+              <a:t>std::vector</a:t>
+            </a:r>
+          </a:p>
+        </p:txBody>
+      </p:sp>
+      <p:sp>
+        <p:nvSpPr>
+          <p:cNvPr id="3" name="object 3"/>
+          <p:cNvSpPr txBox="1">
+            <a:spLocks noGrp="1"/>
+          </p:cNvSpPr>
+          <p:nvPr>
+            <p:ph type="body" idx="1"/>
+          </p:nvPr>
+        </p:nvSpPr>
+        <p:spPr>
+          <a:prstGeom prst="rect">
+            <a:avLst/>
+          </a:prstGeom>
+        </p:spPr>
+        <p:txBody>
+          <a:bodyPr vert="horz" wrap="square" lIns="0" tIns="76835" rIns="0" bIns="0" rtlCol="0">
             <a:spAutoFit/>
           </a:bodyPr>
           <a:lstStyle/>
@@ -2316,135 +2305,59 @@
               </a:tabLst>
             </a:pPr>
             <a:r>
-              <a:rPr dirty="0" sz="2800" spc="-20">
-                <a:latin typeface="Microsoft Sans Serif"/>
-                <a:cs typeface="Microsoft Sans Serif"/>
-              </a:rPr>
-              <a:t>Похоже</a:t>
-            </a:r>
-            <a:r>
-              <a:rPr dirty="0" sz="2800" spc="-120">
-                <a:latin typeface="Microsoft Sans Serif"/>
-                <a:cs typeface="Microsoft Sans Serif"/>
-              </a:rPr>
-              <a:t> </a:t>
-            </a:r>
-            <a:r>
-              <a:rPr dirty="0" sz="2800">
-                <a:latin typeface="Microsoft Sans Serif"/>
-                <a:cs typeface="Microsoft Sans Serif"/>
-              </a:rPr>
-              <a:t>на</a:t>
-            </a:r>
-            <a:r>
-              <a:rPr dirty="0" sz="2800" spc="-130">
-                <a:latin typeface="Microsoft Sans Serif"/>
-                <a:cs typeface="Microsoft Sans Serif"/>
-              </a:rPr>
-              <a:t> </a:t>
-            </a:r>
-            <a:r>
-              <a:rPr dirty="0" sz="2800" spc="-10">
-                <a:latin typeface="Microsoft Sans Serif"/>
-                <a:cs typeface="Microsoft Sans Serif"/>
-              </a:rPr>
-              <a:t>std::vector&lt;char&gt;</a:t>
-            </a:r>
-            <a:endParaRPr sz="2800">
-              <a:latin typeface="Microsoft Sans Serif"/>
-              <a:cs typeface="Microsoft Sans Serif"/>
-            </a:endParaRPr>
-          </a:p>
-          <a:p>
-            <a:pPr marL="12700">
+              <a:rPr spc="-55" dirty="0"/>
+              <a:t>Динамический</a:t>
+            </a:r>
+            <a:r>
+              <a:rPr spc="-110" dirty="0"/>
+              <a:t> </a:t>
+            </a:r>
+            <a:r>
+              <a:rPr spc="-10" dirty="0"/>
+              <a:t>массив</a:t>
+            </a:r>
+          </a:p>
+          <a:p>
+            <a:pPr marL="242570" indent="-229870">
               <a:lnSpc>
                 <a:spcPct val="100000"/>
               </a:lnSpc>
               <a:spcBef>
                 <a:spcPts val="500"/>
               </a:spcBef>
-            </a:pPr>
-            <a:r>
-              <a:rPr dirty="0" sz="2800">
-                <a:latin typeface="Microsoft Sans Serif"/>
-                <a:cs typeface="Microsoft Sans Serif"/>
-              </a:rPr>
-              <a:t>•</a:t>
-            </a:r>
-            <a:r>
-              <a:rPr dirty="0" sz="2800" spc="-15">
-                <a:latin typeface="Microsoft Sans Serif"/>
-                <a:cs typeface="Microsoft Sans Serif"/>
-              </a:rPr>
-              <a:t> </a:t>
-            </a:r>
-            <a:r>
-              <a:rPr dirty="0" sz="2800">
-                <a:latin typeface="Microsoft Sans Serif"/>
-                <a:cs typeface="Microsoft Sans Serif"/>
-              </a:rPr>
-              <a:t>+</a:t>
-            </a:r>
-            <a:r>
-              <a:rPr dirty="0" sz="2800" spc="-45">
-                <a:latin typeface="Microsoft Sans Serif"/>
-                <a:cs typeface="Microsoft Sans Serif"/>
-              </a:rPr>
-              <a:t> </a:t>
-            </a:r>
-            <a:r>
-              <a:rPr dirty="0" sz="2800">
-                <a:latin typeface="Microsoft Sans Serif"/>
-                <a:cs typeface="Microsoft Sans Serif"/>
-              </a:rPr>
-              <a:t>(+=)</a:t>
-            </a:r>
-            <a:r>
-              <a:rPr dirty="0" sz="2800" spc="-30">
-                <a:latin typeface="Microsoft Sans Serif"/>
-                <a:cs typeface="Microsoft Sans Serif"/>
-              </a:rPr>
-              <a:t> </a:t>
-            </a:r>
-            <a:r>
-              <a:rPr dirty="0" sz="2800">
-                <a:latin typeface="Microsoft Sans Serif"/>
-                <a:cs typeface="Microsoft Sans Serif"/>
-              </a:rPr>
+              <a:buChar char="•"/>
+              <a:tabLst>
+                <a:tab pos="242570" algn="l"/>
+              </a:tabLst>
+            </a:pPr>
+            <a:r>
+              <a:rPr dirty="0"/>
+              <a:t>size()</a:t>
+            </a:r>
+            <a:r>
+              <a:rPr spc="-110" dirty="0"/>
+              <a:t> </a:t>
+            </a:r>
+            <a:r>
+              <a:rPr dirty="0"/>
               <a:t>-</a:t>
             </a:r>
             <a:r>
-              <a:rPr dirty="0" sz="2800" spc="-50">
-                <a:latin typeface="Microsoft Sans Serif"/>
-                <a:cs typeface="Microsoft Sans Serif"/>
-              </a:rPr>
-              <a:t> </a:t>
-            </a:r>
-            <a:r>
-              <a:rPr dirty="0" sz="2800">
-                <a:latin typeface="Microsoft Sans Serif"/>
-                <a:cs typeface="Microsoft Sans Serif"/>
-              </a:rPr>
-              <a:t>сложить</a:t>
-            </a:r>
-            <a:r>
-              <a:rPr dirty="0" sz="2800" spc="-20">
-                <a:latin typeface="Microsoft Sans Serif"/>
-                <a:cs typeface="Microsoft Sans Serif"/>
-              </a:rPr>
-              <a:t> </a:t>
-            </a:r>
-            <a:r>
-              <a:rPr dirty="0" sz="2800" spc="-10">
-                <a:latin typeface="Microsoft Sans Serif"/>
-                <a:cs typeface="Microsoft Sans Serif"/>
-              </a:rPr>
-              <a:t>строки</a:t>
-            </a:r>
-            <a:endParaRPr sz="2800">
-              <a:latin typeface="Microsoft Sans Serif"/>
-              <a:cs typeface="Microsoft Sans Serif"/>
-            </a:endParaRPr>
+              <a:rPr spc="-95" dirty="0"/>
+              <a:t> </a:t>
+            </a:r>
+            <a:r>
+              <a:rPr spc="-20" dirty="0"/>
+              <a:t>размер</a:t>
+            </a:r>
+            <a:r>
+              <a:rPr spc="-90" dirty="0"/>
+              <a:t> </a:t>
+            </a:r>
+            <a:r>
+              <a:rPr spc="-10" dirty="0"/>
+              <a:t>массива</a:t>
+            </a:r>
           </a:p>
           <a:p>
             <a:pPr marL="242570" indent="-229870">
@@ -2460,72 +2373,33 @@
               </a:tabLst>
             </a:pPr>
             <a:r>
-              <a:rPr dirty="0" sz="2800" spc="-10">
-                <a:latin typeface="Microsoft Sans Serif"/>
-                <a:cs typeface="Microsoft Sans Serif"/>
-              </a:rPr>
-              <a:t>substr(start,</a:t>
-            </a:r>
-            <a:r>
-              <a:rPr dirty="0" sz="2800" spc="-114">
-                <a:latin typeface="Microsoft Sans Serif"/>
-                <a:cs typeface="Microsoft Sans Serif"/>
-              </a:rPr>
-              <a:t> </a:t>
-            </a:r>
-            <a:r>
-              <a:rPr dirty="0" sz="2800">
-                <a:latin typeface="Microsoft Sans Serif"/>
-                <a:cs typeface="Microsoft Sans Serif"/>
-              </a:rPr>
-              <a:t>count)</a:t>
-            </a:r>
-            <a:r>
-              <a:rPr dirty="0" sz="2800" spc="-90">
-                <a:latin typeface="Microsoft Sans Serif"/>
-                <a:cs typeface="Microsoft Sans Serif"/>
-              </a:rPr>
-              <a:t> </a:t>
-            </a:r>
-            <a:r>
-              <a:rPr dirty="0" sz="2800">
-                <a:latin typeface="Microsoft Sans Serif"/>
-                <a:cs typeface="Microsoft Sans Serif"/>
-              </a:rPr>
+              <a:rPr dirty="0"/>
+              <a:t>capacity()</a:t>
+            </a:r>
+            <a:r>
+              <a:rPr spc="-125" dirty="0"/>
+              <a:t> </a:t>
+            </a:r>
+            <a:r>
+              <a:rPr dirty="0"/>
               <a:t>-</a:t>
             </a:r>
             <a:r>
-              <a:rPr dirty="0" sz="2800" spc="-110">
-                <a:latin typeface="Microsoft Sans Serif"/>
-                <a:cs typeface="Microsoft Sans Serif"/>
-              </a:rPr>
-              <a:t> </a:t>
-            </a:r>
-            <a:r>
-              <a:rPr dirty="0" sz="2800">
-                <a:latin typeface="Microsoft Sans Serif"/>
-                <a:cs typeface="Microsoft Sans Serif"/>
-              </a:rPr>
-              <a:t>вернуть</a:t>
-            </a:r>
-            <a:r>
-              <a:rPr dirty="0" sz="2800" spc="-90">
-                <a:latin typeface="Microsoft Sans Serif"/>
-                <a:cs typeface="Microsoft Sans Serif"/>
-              </a:rPr>
-              <a:t> </a:t>
-            </a:r>
-            <a:r>
-              <a:rPr dirty="0" sz="2800" spc="-10">
-                <a:latin typeface="Microsoft Sans Serif"/>
-                <a:cs typeface="Microsoft Sans Serif"/>
-              </a:rPr>
-              <a:t>подстроку</a:t>
-            </a:r>
-            <a:endParaRPr sz="2800">
-              <a:latin typeface="Microsoft Sans Serif"/>
-              <a:cs typeface="Microsoft Sans Serif"/>
-            </a:endParaRPr>
+              <a:rPr spc="-125" dirty="0"/>
+              <a:t> </a:t>
+            </a:r>
+            <a:r>
+              <a:rPr spc="-20" dirty="0"/>
+              <a:t>вместимость</a:t>
+            </a:r>
+            <a:r>
+              <a:rPr spc="-110" dirty="0"/>
+              <a:t> </a:t>
+            </a:r>
+            <a:r>
+              <a:rPr spc="-10" dirty="0"/>
+              <a:t>массива</a:t>
+            </a:r>
           </a:p>
           <a:p>
             <a:pPr marL="242570" indent="-229870">
@@ -2541,86 +2415,57 @@
               </a:tabLst>
             </a:pPr>
             <a:r>
-              <a:rPr dirty="0" sz="2800" spc="-10">
-                <a:latin typeface="Microsoft Sans Serif"/>
-                <a:cs typeface="Microsoft Sans Serif"/>
-              </a:rPr>
-              <a:t>find(std::string)</a:t>
-            </a:r>
-            <a:r>
-              <a:rPr dirty="0" sz="2800" spc="-120">
-                <a:latin typeface="Microsoft Sans Serif"/>
-                <a:cs typeface="Microsoft Sans Serif"/>
-              </a:rPr>
-              <a:t> </a:t>
-            </a:r>
-            <a:r>
-              <a:rPr dirty="0" sz="2800">
-                <a:latin typeface="Microsoft Sans Serif"/>
-                <a:cs typeface="Microsoft Sans Serif"/>
-              </a:rPr>
+              <a:rPr dirty="0"/>
+              <a:t>push_back()</a:t>
+            </a:r>
+            <a:r>
+              <a:rPr spc="-150" dirty="0"/>
+              <a:t> </a:t>
+            </a:r>
+            <a:r>
+              <a:rPr dirty="0"/>
               <a:t>-</a:t>
             </a:r>
             <a:r>
-              <a:rPr dirty="0" sz="2800" spc="-120">
-                <a:latin typeface="Microsoft Sans Serif"/>
-                <a:cs typeface="Microsoft Sans Serif"/>
-              </a:rPr>
-              <a:t> </a:t>
-            </a:r>
-            <a:r>
-              <a:rPr dirty="0" sz="2800">
-                <a:latin typeface="Microsoft Sans Serif"/>
-                <a:cs typeface="Microsoft Sans Serif"/>
-              </a:rPr>
-              <a:t>найти</a:t>
-            </a:r>
-            <a:r>
-              <a:rPr dirty="0" sz="2800" spc="-120">
-                <a:latin typeface="Microsoft Sans Serif"/>
-                <a:cs typeface="Microsoft Sans Serif"/>
-              </a:rPr>
-              <a:t> </a:t>
-            </a:r>
-            <a:r>
-              <a:rPr dirty="0" sz="2800" spc="-10">
-                <a:latin typeface="Microsoft Sans Serif"/>
-                <a:cs typeface="Microsoft Sans Serif"/>
-              </a:rPr>
-              <a:t>индекс</a:t>
-            </a:r>
-            <a:r>
-              <a:rPr dirty="0" sz="2800" spc="-135">
-                <a:latin typeface="Microsoft Sans Serif"/>
-                <a:cs typeface="Microsoft Sans Serif"/>
-              </a:rPr>
-              <a:t> </a:t>
-            </a:r>
-            <a:r>
-              <a:rPr dirty="0" sz="2800" spc="-20">
-                <a:latin typeface="Microsoft Sans Serif"/>
-                <a:cs typeface="Microsoft Sans Serif"/>
-              </a:rPr>
-              <a:t>вхождения</a:t>
-            </a:r>
-            <a:r>
-              <a:rPr dirty="0" sz="2800" spc="-114">
-                <a:latin typeface="Microsoft Sans Serif"/>
-                <a:cs typeface="Microsoft Sans Serif"/>
-              </a:rPr>
-              <a:t> </a:t>
-            </a:r>
-            <a:r>
-              <a:rPr dirty="0" sz="2800" spc="-10">
-                <a:latin typeface="Microsoft Sans Serif"/>
-                <a:cs typeface="Microsoft Sans Serif"/>
-              </a:rPr>
-              <a:t>подстроки</a:t>
-            </a:r>
-            <a:endParaRPr sz="2800">
-              <a:latin typeface="Microsoft Sans Serif"/>
-              <a:cs typeface="Microsoft Sans Serif"/>
-            </a:endParaRPr>
+              <a:rPr spc="-135" dirty="0"/>
+              <a:t> </a:t>
+            </a:r>
+            <a:r>
+              <a:rPr dirty="0"/>
+              <a:t>добавить</a:t>
+            </a:r>
+            <a:r>
+              <a:rPr spc="-145" dirty="0"/>
+              <a:t> </a:t>
+            </a:r>
+            <a:r>
+              <a:rPr dirty="0"/>
+              <a:t>элемент</a:t>
+            </a:r>
+            <a:r>
+              <a:rPr spc="-120" dirty="0"/>
+              <a:t> </a:t>
+            </a:r>
+            <a:r>
+              <a:rPr dirty="0"/>
+              <a:t>в</a:t>
+            </a:r>
+            <a:r>
+              <a:rPr spc="-145" dirty="0"/>
+              <a:t> </a:t>
+            </a:r>
+            <a:r>
+              <a:rPr dirty="0"/>
+              <a:t>конец</a:t>
+            </a:r>
+            <a:r>
+              <a:rPr spc="-150" dirty="0"/>
+              <a:t> </a:t>
+            </a:r>
+            <a:r>
+              <a:rPr spc="-10" dirty="0"/>
+              <a:t>массива</a:t>
+            </a:r>
           </a:p>
           <a:p>
             <a:pPr marL="242570" indent="-229870">
@@ -2636,117 +2481,60 @@
               </a:tabLst>
             </a:pPr>
             <a:r>
-              <a:rPr dirty="0" sz="2800">
-                <a:latin typeface="Microsoft Sans Serif"/>
-                <a:cs typeface="Microsoft Sans Serif"/>
-              </a:rPr>
-              <a:t>insert(pos,</a:t>
-            </a:r>
-            <a:r>
-              <a:rPr dirty="0" sz="2800" spc="-130">
-                <a:latin typeface="Microsoft Sans Serif"/>
-                <a:cs typeface="Microsoft Sans Serif"/>
-              </a:rPr>
-              <a:t> </a:t>
-            </a:r>
-            <a:r>
-              <a:rPr dirty="0" sz="2800">
-                <a:latin typeface="Microsoft Sans Serif"/>
-                <a:cs typeface="Microsoft Sans Serif"/>
-              </a:rPr>
-              <a:t>string)</a:t>
-            </a:r>
-            <a:r>
-              <a:rPr dirty="0" sz="2800" spc="-125">
-                <a:latin typeface="Microsoft Sans Serif"/>
-                <a:cs typeface="Microsoft Sans Serif"/>
-              </a:rPr>
-              <a:t> </a:t>
-            </a:r>
-            <a:r>
-              <a:rPr dirty="0" sz="2800">
-                <a:latin typeface="Microsoft Sans Serif"/>
-                <a:cs typeface="Microsoft Sans Serif"/>
-              </a:rPr>
+              <a:rPr dirty="0"/>
+              <a:t>pop_back()</a:t>
+            </a:r>
+            <a:r>
+              <a:rPr spc="-125" dirty="0"/>
+              <a:t> </a:t>
+            </a:r>
+            <a:r>
+              <a:rPr dirty="0"/>
               <a:t>-</a:t>
             </a:r>
             <a:r>
-              <a:rPr dirty="0" sz="2800" spc="-135">
-                <a:latin typeface="Microsoft Sans Serif"/>
-                <a:cs typeface="Microsoft Sans Serif"/>
-              </a:rPr>
-              <a:t> </a:t>
-            </a:r>
-            <a:r>
-              <a:rPr dirty="0" sz="2800">
-                <a:latin typeface="Microsoft Sans Serif"/>
-                <a:cs typeface="Microsoft Sans Serif"/>
-              </a:rPr>
-              <a:t>вставить</a:t>
-            </a:r>
-            <a:r>
-              <a:rPr dirty="0" sz="2800" spc="-114">
-                <a:latin typeface="Microsoft Sans Serif"/>
-                <a:cs typeface="Microsoft Sans Serif"/>
-              </a:rPr>
-              <a:t> </a:t>
-            </a:r>
-            <a:r>
-              <a:rPr dirty="0" sz="2800" spc="-10">
-                <a:latin typeface="Microsoft Sans Serif"/>
-                <a:cs typeface="Microsoft Sans Serif"/>
-              </a:rPr>
-              <a:t>строку</a:t>
-            </a:r>
-            <a:r>
-              <a:rPr dirty="0" sz="2800" spc="-145">
-                <a:latin typeface="Microsoft Sans Serif"/>
-                <a:cs typeface="Microsoft Sans Serif"/>
-              </a:rPr>
-              <a:t> </a:t>
-            </a:r>
-            <a:r>
-              <a:rPr dirty="0" sz="2800">
-                <a:latin typeface="Microsoft Sans Serif"/>
-                <a:cs typeface="Microsoft Sans Serif"/>
-              </a:rPr>
-              <a:t>на</a:t>
-            </a:r>
-            <a:r>
-              <a:rPr dirty="0" sz="2800" spc="-125">
-                <a:latin typeface="Microsoft Sans Serif"/>
-                <a:cs typeface="Microsoft Sans Serif"/>
-              </a:rPr>
-              <a:t> </a:t>
-            </a:r>
-            <a:r>
-              <a:rPr dirty="0" sz="2800">
-                <a:latin typeface="Microsoft Sans Serif"/>
-                <a:cs typeface="Microsoft Sans Serif"/>
-              </a:rPr>
-              <a:t>нужную</a:t>
-            </a:r>
-            <a:r>
-              <a:rPr dirty="0" sz="2800" spc="-125">
-                <a:latin typeface="Microsoft Sans Serif"/>
-                <a:cs typeface="Microsoft Sans Serif"/>
-              </a:rPr>
-              <a:t> </a:t>
-            </a:r>
-            <a:r>
-              <a:rPr dirty="0" sz="2800" spc="-10">
-                <a:latin typeface="Microsoft Sans Serif"/>
-                <a:cs typeface="Microsoft Sans Serif"/>
-              </a:rPr>
-              <a:t>позицию</a:t>
-            </a:r>
-            <a:endParaRPr sz="2800">
-              <a:latin typeface="Microsoft Sans Serif"/>
-              <a:cs typeface="Microsoft Sans Serif"/>
-            </a:endParaRPr>
-          </a:p>
-          <a:p>
-            <a:pPr marL="241300" marR="19050" indent="-228600">
+              <a:rPr spc="-140" dirty="0"/>
+              <a:t> </a:t>
+            </a:r>
+            <a:r>
+              <a:rPr spc="-25" dirty="0"/>
+              <a:t>извлечь</a:t>
+            </a:r>
+            <a:r>
+              <a:rPr spc="-160" dirty="0"/>
+              <a:t> </a:t>
+            </a:r>
+            <a:r>
+              <a:rPr dirty="0" err="1"/>
+              <a:t>элемент</a:t>
+            </a:r>
+            <a:r>
+              <a:rPr spc="-114" dirty="0"/>
+              <a:t> </a:t>
+            </a:r>
+            <a:r>
+              <a:rPr lang="ru-RU" spc="-114" dirty="0"/>
+              <a:t>из</a:t>
+            </a:r>
+            <a:r>
+              <a:rPr spc="-140" dirty="0"/>
+              <a:t> </a:t>
+            </a:r>
+            <a:r>
+              <a:rPr dirty="0"/>
+              <a:t>конца</a:t>
+            </a:r>
+            <a:r>
+              <a:rPr spc="-125" dirty="0"/>
+              <a:t> </a:t>
+            </a:r>
+            <a:r>
+              <a:rPr spc="-10" dirty="0"/>
+              <a:t>массива</a:t>
+            </a:r>
+          </a:p>
+          <a:p>
+            <a:pPr marL="241300" marR="5080" indent="-228600">
               <a:lnSpc>
                 <a:spcPts val="2890"/>
               </a:lnSpc>
@@ -2759,100 +2547,65 @@
               </a:tabLst>
             </a:pPr>
             <a:r>
-              <a:rPr dirty="0" sz="2800" spc="-10">
-                <a:latin typeface="Microsoft Sans Serif"/>
-                <a:cs typeface="Microsoft Sans Serif"/>
-              </a:rPr>
-              <a:t>replace(start,</a:t>
-            </a:r>
-            <a:r>
-              <a:rPr dirty="0" sz="2800" spc="-110">
-                <a:latin typeface="Microsoft Sans Serif"/>
-                <a:cs typeface="Microsoft Sans Serif"/>
-              </a:rPr>
-              <a:t> </a:t>
-            </a:r>
-            <a:r>
-              <a:rPr dirty="0" sz="2800">
-                <a:latin typeface="Microsoft Sans Serif"/>
-                <a:cs typeface="Microsoft Sans Serif"/>
-              </a:rPr>
-              <a:t>count,</a:t>
-            </a:r>
-            <a:r>
-              <a:rPr dirty="0" sz="2800" spc="-114">
-                <a:latin typeface="Microsoft Sans Serif"/>
-                <a:cs typeface="Microsoft Sans Serif"/>
-              </a:rPr>
-              <a:t> </a:t>
-            </a:r>
-            <a:r>
-              <a:rPr dirty="0" sz="2800">
-                <a:latin typeface="Microsoft Sans Serif"/>
-                <a:cs typeface="Microsoft Sans Serif"/>
-              </a:rPr>
-              <a:t>string)</a:t>
-            </a:r>
-            <a:r>
-              <a:rPr dirty="0" sz="2800" spc="-100">
-                <a:latin typeface="Microsoft Sans Serif"/>
-                <a:cs typeface="Microsoft Sans Serif"/>
-              </a:rPr>
-              <a:t> </a:t>
-            </a:r>
-            <a:r>
-              <a:rPr dirty="0" sz="2800">
-                <a:latin typeface="Microsoft Sans Serif"/>
-                <a:cs typeface="Microsoft Sans Serif"/>
-              </a:rPr>
+              <a:rPr dirty="0"/>
+              <a:t>front()</a:t>
+            </a:r>
+            <a:r>
+              <a:rPr spc="-105" dirty="0"/>
+              <a:t> </a:t>
+            </a:r>
+            <a:r>
+              <a:rPr dirty="0"/>
+              <a:t>/</a:t>
+            </a:r>
+            <a:r>
+              <a:rPr spc="-110" dirty="0"/>
+              <a:t> </a:t>
+            </a:r>
+            <a:r>
+              <a:rPr dirty="0"/>
+              <a:t>back()</a:t>
+            </a:r>
+            <a:r>
+              <a:rPr spc="-90" dirty="0"/>
+              <a:t> </a:t>
+            </a:r>
+            <a:r>
+              <a:rPr dirty="0"/>
               <a:t>-</a:t>
             </a:r>
             <a:r>
-              <a:rPr dirty="0" sz="2800" spc="-105">
-                <a:latin typeface="Microsoft Sans Serif"/>
-                <a:cs typeface="Microsoft Sans Serif"/>
-              </a:rPr>
-              <a:t> </a:t>
-            </a:r>
-            <a:r>
-              <a:rPr dirty="0" sz="2800" spc="-25">
-                <a:latin typeface="Microsoft Sans Serif"/>
-                <a:cs typeface="Microsoft Sans Serif"/>
-              </a:rPr>
-              <a:t>заменить</a:t>
-            </a:r>
-            <a:r>
-              <a:rPr dirty="0" sz="2800" spc="-90">
-                <a:latin typeface="Microsoft Sans Serif"/>
-                <a:cs typeface="Microsoft Sans Serif"/>
-              </a:rPr>
-              <a:t> </a:t>
-            </a:r>
-            <a:r>
-              <a:rPr dirty="0" sz="2800" spc="-30">
-                <a:latin typeface="Microsoft Sans Serif"/>
-                <a:cs typeface="Microsoft Sans Serif"/>
-              </a:rPr>
-              <a:t>подстроку</a:t>
-            </a:r>
-            <a:r>
-              <a:rPr dirty="0" sz="2800" spc="-135">
-                <a:latin typeface="Microsoft Sans Serif"/>
-                <a:cs typeface="Microsoft Sans Serif"/>
-              </a:rPr>
-              <a:t> </a:t>
-            </a:r>
-            <a:r>
-              <a:rPr dirty="0" sz="2800" spc="-10">
-                <a:latin typeface="Microsoft Sans Serif"/>
-                <a:cs typeface="Microsoft Sans Serif"/>
-              </a:rPr>
-              <a:t>другой строкой</a:t>
-            </a:r>
-            <a:endParaRPr sz="2800">
-              <a:latin typeface="Microsoft Sans Serif"/>
-              <a:cs typeface="Microsoft Sans Serif"/>
-            </a:endParaRPr>
+              <a:rPr spc="-110" dirty="0"/>
+              <a:t> </a:t>
+            </a:r>
+            <a:r>
+              <a:rPr dirty="0"/>
+              <a:t>обращение</a:t>
+            </a:r>
+            <a:r>
+              <a:rPr spc="-70" dirty="0"/>
+              <a:t> </a:t>
+            </a:r>
+            <a:r>
+              <a:rPr dirty="0"/>
+              <a:t>к</a:t>
+            </a:r>
+            <a:r>
+              <a:rPr spc="-110" dirty="0"/>
+              <a:t> </a:t>
+            </a:r>
+            <a:r>
+              <a:rPr spc="-30" dirty="0"/>
+              <a:t>первому/последнему</a:t>
+            </a:r>
+            <a:r>
+              <a:rPr spc="-65" dirty="0"/>
+              <a:t> </a:t>
+            </a:r>
+            <a:r>
+              <a:rPr spc="-10" dirty="0"/>
+              <a:t>элементу массива</a:t>
+            </a:r>
           </a:p>
           <a:p>
             <a:pPr marL="242570" indent="-229870">
@@ -2868,72 +2621,49 @@
               </a:tabLst>
             </a:pPr>
             <a:r>
-              <a:rPr dirty="0" sz="2800">
-                <a:latin typeface="Microsoft Sans Serif"/>
-                <a:cs typeface="Microsoft Sans Serif"/>
-              </a:rPr>
-              <a:t>erase(start,</a:t>
-            </a:r>
-            <a:r>
-              <a:rPr dirty="0" sz="2800" spc="-150">
-                <a:latin typeface="Microsoft Sans Serif"/>
-                <a:cs typeface="Microsoft Sans Serif"/>
-              </a:rPr>
-              <a:t> </a:t>
-            </a:r>
-            <a:r>
-              <a:rPr dirty="0" sz="2800">
-                <a:latin typeface="Microsoft Sans Serif"/>
-                <a:cs typeface="Microsoft Sans Serif"/>
-              </a:rPr>
-              <a:t>count)</a:t>
-            </a:r>
-            <a:r>
-              <a:rPr dirty="0" sz="2800" spc="-105">
-                <a:latin typeface="Microsoft Sans Serif"/>
-                <a:cs typeface="Microsoft Sans Serif"/>
-              </a:rPr>
-              <a:t> </a:t>
-            </a:r>
-            <a:r>
-              <a:rPr dirty="0" sz="2800">
-                <a:latin typeface="Microsoft Sans Serif"/>
-                <a:cs typeface="Microsoft Sans Serif"/>
-              </a:rPr>
+              <a:rPr dirty="0"/>
+              <a:t>data()</a:t>
+            </a:r>
+            <a:r>
+              <a:rPr spc="-100" dirty="0"/>
+              <a:t> </a:t>
+            </a:r>
+            <a:r>
+              <a:rPr dirty="0"/>
               <a:t>-</a:t>
             </a:r>
             <a:r>
-              <a:rPr dirty="0" sz="2800" spc="-114">
-                <a:latin typeface="Microsoft Sans Serif"/>
-                <a:cs typeface="Microsoft Sans Serif"/>
-              </a:rPr>
-              <a:t> </a:t>
-            </a:r>
-            <a:r>
-              <a:rPr dirty="0" sz="2800">
-                <a:latin typeface="Microsoft Sans Serif"/>
-                <a:cs typeface="Microsoft Sans Serif"/>
-              </a:rPr>
-              <a:t>удалить</a:t>
-            </a:r>
-            <a:r>
-              <a:rPr dirty="0" sz="2800" spc="-114">
-                <a:latin typeface="Microsoft Sans Serif"/>
-                <a:cs typeface="Microsoft Sans Serif"/>
-              </a:rPr>
-              <a:t> </a:t>
-            </a:r>
-            <a:r>
-              <a:rPr dirty="0" sz="2800" spc="-10">
-                <a:latin typeface="Microsoft Sans Serif"/>
-                <a:cs typeface="Microsoft Sans Serif"/>
-              </a:rPr>
-              <a:t>подстроку</a:t>
-            </a:r>
-            <a:endParaRPr sz="2800">
-              <a:latin typeface="Microsoft Sans Serif"/>
-              <a:cs typeface="Microsoft Sans Serif"/>
-            </a:endParaRPr>
+              <a:rPr spc="-100" dirty="0"/>
+              <a:t> </a:t>
+            </a:r>
+            <a:r>
+              <a:rPr spc="-50" dirty="0"/>
+              <a:t>указатель</a:t>
+            </a:r>
+            <a:r>
+              <a:rPr spc="-135" dirty="0"/>
+              <a:t> </a:t>
+            </a:r>
+            <a:r>
+              <a:rPr dirty="0"/>
+              <a:t>на</a:t>
+            </a:r>
+            <a:r>
+              <a:rPr spc="-100" dirty="0"/>
+              <a:t> </a:t>
+            </a:r>
+            <a:r>
+              <a:rPr dirty="0"/>
+              <a:t>элементы</a:t>
+            </a:r>
+            <a:r>
+              <a:rPr spc="-80" dirty="0"/>
+              <a:t> </a:t>
+            </a:r>
+            <a:r>
+              <a:rPr spc="-10" dirty="0"/>
+              <a:t>массива</a:t>
+            </a:r>
           </a:p>
           <a:p>
             <a:pPr marL="242570" indent="-229870">
@@ -2952,7 +2682,7 @@
               </a:tabLst>
             </a:pPr>
             <a:r>
-              <a:rPr dirty="0" u="sng" sz="2800" spc="-10">
+              <a:rPr u="sng" spc="-10" dirty="0">
                 <a:solidFill>
                   <a:srgbClr val="0462C1"/>
                 </a:solidFill>
@@ -2961,13 +2691,760 @@
                     <a:srgbClr val="0462C1"/>
                   </a:solidFill>
                 </a:uFill>
-                <a:latin typeface="Microsoft Sans Serif"/>
-                <a:cs typeface="Microsoft Sans Serif"/>
                 <a:hlinkClick r:id="rId2"/>
               </a:rPr>
               <a:t>cppreference</a:t>
             </a:r>
-            <a:endParaRPr sz="2800">
+          </a:p>
+        </p:txBody>
+      </p:sp>
+    </p:spTree>
+  </p:cSld>
+  <p:clrMapOvr>
+    <a:masterClrMapping/>
+  </p:clrMapOvr>
+</p:sld>
+</file>
+
+<file path=ppt/slides/slide6.xml><?xml version="1.0" encoding="utf-8"?>
+<p:sld xmlns:a="http://schemas.openxmlformats.org/drawingml/2006/main" xmlns:r="http://schemas.openxmlformats.org/officeDocument/2006/relationships" xmlns:p="http://schemas.openxmlformats.org/presentationml/2006/main" showMasterSp="0">
+  <p:cSld>
+    <p:spTree>
+      <p:nvGrpSpPr>
+        <p:cNvPr id="1" name=""/>
+        <p:cNvGrpSpPr/>
+        <p:nvPr/>
+      </p:nvGrpSpPr>
+      <p:grpSpPr>
+        <a:xfrm>
+          <a:off x="0" y="0"/>
+          <a:ext cx="0" cy="0"/>
+          <a:chOff x="0" y="0"/>
+          <a:chExt cx="0" cy="0"/>
+        </a:xfrm>
+      </p:grpSpPr>
+      <p:sp>
+        <p:nvSpPr>
+          <p:cNvPr id="2" name="object 2"/>
+          <p:cNvSpPr txBox="1">
+            <a:spLocks noGrp="1"/>
+          </p:cNvSpPr>
+          <p:nvPr>
+            <p:ph type="title"/>
+          </p:nvPr>
+        </p:nvSpPr>
+        <p:spPr>
+          <a:prstGeom prst="rect">
+            <a:avLst/>
+          </a:prstGeom>
+        </p:spPr>
+        <p:txBody>
+          <a:bodyPr vert="horz" wrap="square" lIns="0" tIns="13335" rIns="0" bIns="0" rtlCol="0">
+            <a:spAutoFit/>
+          </a:bodyPr>
+          <a:lstStyle/>
+          <a:p>
+            <a:pPr marL="12700">
+              <a:lnSpc>
+                <a:spcPct val="100000"/>
+              </a:lnSpc>
+              <a:spcBef>
+                <a:spcPts val="105"/>
+              </a:spcBef>
+            </a:pPr>
+            <a:r>
+              <a:rPr spc="-10" dirty="0"/>
+              <a:t>std::string</a:t>
+            </a:r>
+          </a:p>
+        </p:txBody>
+      </p:sp>
+      <p:sp>
+        <p:nvSpPr>
+          <p:cNvPr id="3" name="object 3"/>
+          <p:cNvSpPr txBox="1"/>
+          <p:nvPr/>
+        </p:nvSpPr>
+        <p:spPr>
+          <a:xfrm>
+            <a:off x="870915" y="1750847"/>
+            <a:ext cx="9279890" cy="4322445"/>
+          </a:xfrm>
+          <a:prstGeom prst="rect">
+            <a:avLst/>
+          </a:prstGeom>
+        </p:spPr>
+        <p:txBody>
+          <a:bodyPr vert="horz" wrap="square" lIns="0" tIns="76835" rIns="0" bIns="0" rtlCol="0">
+            <a:spAutoFit/>
+          </a:bodyPr>
+          <a:lstStyle/>
+          <a:p>
+            <a:pPr marL="242570" indent="-229870">
+              <a:lnSpc>
+                <a:spcPct val="100000"/>
+              </a:lnSpc>
+              <a:spcBef>
+                <a:spcPts val="605"/>
+              </a:spcBef>
+              <a:buChar char="•"/>
+              <a:tabLst>
+                <a:tab pos="242570" algn="l"/>
+              </a:tabLst>
+            </a:pPr>
+            <a:r>
+              <a:rPr sz="2800" spc="-20" dirty="0">
+                <a:latin typeface="Microsoft Sans Serif"/>
+                <a:cs typeface="Microsoft Sans Serif"/>
+              </a:rPr>
+              <a:t>Похоже</a:t>
+            </a:r>
+            <a:r>
+              <a:rPr sz="2800" spc="-120" dirty="0">
+                <a:latin typeface="Microsoft Sans Serif"/>
+                <a:cs typeface="Microsoft Sans Serif"/>
+              </a:rPr>
+              <a:t> </a:t>
+            </a:r>
+            <a:r>
+              <a:rPr sz="2800" dirty="0">
+                <a:latin typeface="Microsoft Sans Serif"/>
+                <a:cs typeface="Microsoft Sans Serif"/>
+              </a:rPr>
+              <a:t>на</a:t>
+            </a:r>
+            <a:r>
+              <a:rPr sz="2800" spc="-130" dirty="0">
+                <a:latin typeface="Microsoft Sans Serif"/>
+                <a:cs typeface="Microsoft Sans Serif"/>
+              </a:rPr>
+              <a:t> </a:t>
+            </a:r>
+            <a:r>
+              <a:rPr sz="2800" spc="-10" dirty="0">
+                <a:latin typeface="Microsoft Sans Serif"/>
+                <a:cs typeface="Microsoft Sans Serif"/>
+              </a:rPr>
+              <a:t>std::vector&lt;char&gt;</a:t>
+            </a:r>
+            <a:endParaRPr sz="2800" dirty="0">
+              <a:latin typeface="Microsoft Sans Serif"/>
+              <a:cs typeface="Microsoft Sans Serif"/>
+            </a:endParaRPr>
+          </a:p>
+          <a:p>
+            <a:pPr marL="12700">
+              <a:lnSpc>
+                <a:spcPct val="100000"/>
+              </a:lnSpc>
+              <a:spcBef>
+                <a:spcPts val="500"/>
+              </a:spcBef>
+            </a:pPr>
+            <a:r>
+              <a:rPr sz="2800" dirty="0">
+                <a:latin typeface="Microsoft Sans Serif"/>
+                <a:cs typeface="Microsoft Sans Serif"/>
+              </a:rPr>
+              <a:t>•</a:t>
+            </a:r>
+            <a:r>
+              <a:rPr sz="2800" spc="-15" dirty="0">
+                <a:latin typeface="Microsoft Sans Serif"/>
+                <a:cs typeface="Microsoft Sans Serif"/>
+              </a:rPr>
+              <a:t> </a:t>
+            </a:r>
+            <a:r>
+              <a:rPr sz="2800" dirty="0">
+                <a:latin typeface="Microsoft Sans Serif"/>
+                <a:cs typeface="Microsoft Sans Serif"/>
+              </a:rPr>
+              <a:t>+</a:t>
+            </a:r>
+            <a:r>
+              <a:rPr sz="2800" spc="-45" dirty="0">
+                <a:latin typeface="Microsoft Sans Serif"/>
+                <a:cs typeface="Microsoft Sans Serif"/>
+              </a:rPr>
+              <a:t> </a:t>
+            </a:r>
+            <a:r>
+              <a:rPr sz="2800" dirty="0">
+                <a:latin typeface="Microsoft Sans Serif"/>
+                <a:cs typeface="Microsoft Sans Serif"/>
+              </a:rPr>
+              <a:t>(+=)</a:t>
+            </a:r>
+            <a:r>
+              <a:rPr sz="2800" spc="-30" dirty="0">
+                <a:latin typeface="Microsoft Sans Serif"/>
+                <a:cs typeface="Microsoft Sans Serif"/>
+              </a:rPr>
+              <a:t> </a:t>
+            </a:r>
+            <a:r>
+              <a:rPr sz="2800" dirty="0">
+                <a:latin typeface="Microsoft Sans Serif"/>
+                <a:cs typeface="Microsoft Sans Serif"/>
+              </a:rPr>
+              <a:t>-</a:t>
+            </a:r>
+            <a:r>
+              <a:rPr sz="2800" spc="-50" dirty="0">
+                <a:latin typeface="Microsoft Sans Serif"/>
+                <a:cs typeface="Microsoft Sans Serif"/>
+              </a:rPr>
+              <a:t> </a:t>
+            </a:r>
+            <a:r>
+              <a:rPr sz="2800" dirty="0">
+                <a:latin typeface="Microsoft Sans Serif"/>
+                <a:cs typeface="Microsoft Sans Serif"/>
+              </a:rPr>
+              <a:t>сложить</a:t>
+            </a:r>
+            <a:r>
+              <a:rPr sz="2800" spc="-20" dirty="0">
+                <a:latin typeface="Microsoft Sans Serif"/>
+                <a:cs typeface="Microsoft Sans Serif"/>
+              </a:rPr>
+              <a:t> </a:t>
+            </a:r>
+            <a:r>
+              <a:rPr sz="2800" spc="-10" dirty="0">
+                <a:latin typeface="Microsoft Sans Serif"/>
+                <a:cs typeface="Microsoft Sans Serif"/>
+              </a:rPr>
+              <a:t>строки</a:t>
+            </a:r>
+            <a:endParaRPr sz="2800" dirty="0">
+              <a:latin typeface="Microsoft Sans Serif"/>
+              <a:cs typeface="Microsoft Sans Serif"/>
+            </a:endParaRPr>
+          </a:p>
+          <a:p>
+            <a:pPr marL="242570" indent="-229870">
+              <a:lnSpc>
+                <a:spcPct val="100000"/>
+              </a:lnSpc>
+              <a:spcBef>
+                <a:spcPts val="495"/>
+              </a:spcBef>
+              <a:buChar char="•"/>
+              <a:tabLst>
+                <a:tab pos="242570" algn="l"/>
+              </a:tabLst>
+            </a:pPr>
+            <a:r>
+              <a:rPr sz="2800" spc="-10" dirty="0">
+                <a:latin typeface="Microsoft Sans Serif"/>
+                <a:cs typeface="Microsoft Sans Serif"/>
+              </a:rPr>
+              <a:t>substr(start,</a:t>
+            </a:r>
+            <a:r>
+              <a:rPr sz="2800" spc="-114" dirty="0">
+                <a:latin typeface="Microsoft Sans Serif"/>
+                <a:cs typeface="Microsoft Sans Serif"/>
+              </a:rPr>
+              <a:t> </a:t>
+            </a:r>
+            <a:r>
+              <a:rPr sz="2800" dirty="0">
+                <a:latin typeface="Microsoft Sans Serif"/>
+                <a:cs typeface="Microsoft Sans Serif"/>
+              </a:rPr>
+              <a:t>count)</a:t>
+            </a:r>
+            <a:r>
+              <a:rPr sz="2800" spc="-90" dirty="0">
+                <a:latin typeface="Microsoft Sans Serif"/>
+                <a:cs typeface="Microsoft Sans Serif"/>
+              </a:rPr>
+              <a:t> </a:t>
+            </a:r>
+            <a:r>
+              <a:rPr sz="2800" dirty="0">
+                <a:latin typeface="Microsoft Sans Serif"/>
+                <a:cs typeface="Microsoft Sans Serif"/>
+              </a:rPr>
+              <a:t>-</a:t>
+            </a:r>
+            <a:r>
+              <a:rPr sz="2800" spc="-110" dirty="0">
+                <a:latin typeface="Microsoft Sans Serif"/>
+                <a:cs typeface="Microsoft Sans Serif"/>
+              </a:rPr>
+              <a:t> </a:t>
+            </a:r>
+            <a:r>
+              <a:rPr sz="2800" dirty="0">
+                <a:latin typeface="Microsoft Sans Serif"/>
+                <a:cs typeface="Microsoft Sans Serif"/>
+              </a:rPr>
+              <a:t>вернуть</a:t>
+            </a:r>
+            <a:r>
+              <a:rPr sz="2800" spc="-90" dirty="0">
+                <a:latin typeface="Microsoft Sans Serif"/>
+                <a:cs typeface="Microsoft Sans Serif"/>
+              </a:rPr>
+              <a:t> </a:t>
+            </a:r>
+            <a:r>
+              <a:rPr sz="2800" spc="-10" dirty="0">
+                <a:latin typeface="Microsoft Sans Serif"/>
+                <a:cs typeface="Microsoft Sans Serif"/>
+              </a:rPr>
+              <a:t>подстроку</a:t>
+            </a:r>
+            <a:endParaRPr sz="2800" dirty="0">
+              <a:latin typeface="Microsoft Sans Serif"/>
+              <a:cs typeface="Microsoft Sans Serif"/>
+            </a:endParaRPr>
+          </a:p>
+          <a:p>
+            <a:pPr marL="242570" indent="-229870">
+              <a:lnSpc>
+                <a:spcPct val="100000"/>
+              </a:lnSpc>
+              <a:spcBef>
+                <a:spcPts val="505"/>
+              </a:spcBef>
+              <a:buChar char="•"/>
+              <a:tabLst>
+                <a:tab pos="242570" algn="l"/>
+              </a:tabLst>
+            </a:pPr>
+            <a:r>
+              <a:rPr sz="2800" spc="-10" dirty="0">
+                <a:latin typeface="Microsoft Sans Serif"/>
+                <a:cs typeface="Microsoft Sans Serif"/>
+              </a:rPr>
+              <a:t>find(std::string)</a:t>
+            </a:r>
+            <a:r>
+              <a:rPr sz="2800" spc="-120" dirty="0">
+                <a:latin typeface="Microsoft Sans Serif"/>
+                <a:cs typeface="Microsoft Sans Serif"/>
+              </a:rPr>
+              <a:t> </a:t>
+            </a:r>
+            <a:r>
+              <a:rPr sz="2800" dirty="0">
+                <a:latin typeface="Microsoft Sans Serif"/>
+                <a:cs typeface="Microsoft Sans Serif"/>
+              </a:rPr>
+              <a:t>-</a:t>
+            </a:r>
+            <a:r>
+              <a:rPr sz="2800" spc="-120" dirty="0">
+                <a:latin typeface="Microsoft Sans Serif"/>
+                <a:cs typeface="Microsoft Sans Serif"/>
+              </a:rPr>
+              <a:t> </a:t>
+            </a:r>
+            <a:r>
+              <a:rPr sz="2800" dirty="0">
+                <a:latin typeface="Microsoft Sans Serif"/>
+                <a:cs typeface="Microsoft Sans Serif"/>
+              </a:rPr>
+              <a:t>найти</a:t>
+            </a:r>
+            <a:r>
+              <a:rPr sz="2800" spc="-120" dirty="0">
+                <a:latin typeface="Microsoft Sans Serif"/>
+                <a:cs typeface="Microsoft Sans Serif"/>
+              </a:rPr>
+              <a:t> </a:t>
+            </a:r>
+            <a:r>
+              <a:rPr sz="2800" spc="-10" dirty="0">
+                <a:latin typeface="Microsoft Sans Serif"/>
+                <a:cs typeface="Microsoft Sans Serif"/>
+              </a:rPr>
+              <a:t>индекс</a:t>
+            </a:r>
+            <a:r>
+              <a:rPr sz="2800" spc="-135" dirty="0">
+                <a:latin typeface="Microsoft Sans Serif"/>
+                <a:cs typeface="Microsoft Sans Serif"/>
+              </a:rPr>
+              <a:t> </a:t>
+            </a:r>
+            <a:r>
+              <a:rPr sz="2800" spc="-20" dirty="0">
+                <a:latin typeface="Microsoft Sans Serif"/>
+                <a:cs typeface="Microsoft Sans Serif"/>
+              </a:rPr>
+              <a:t>вхождения</a:t>
+            </a:r>
+            <a:r>
+              <a:rPr sz="2800" spc="-114" dirty="0">
+                <a:latin typeface="Microsoft Sans Serif"/>
+                <a:cs typeface="Microsoft Sans Serif"/>
+              </a:rPr>
+              <a:t> </a:t>
+            </a:r>
+            <a:r>
+              <a:rPr sz="2800" spc="-10" dirty="0">
+                <a:latin typeface="Microsoft Sans Serif"/>
+                <a:cs typeface="Microsoft Sans Serif"/>
+              </a:rPr>
+              <a:t>подстроки</a:t>
+            </a:r>
+            <a:endParaRPr sz="2800" dirty="0">
+              <a:latin typeface="Microsoft Sans Serif"/>
+              <a:cs typeface="Microsoft Sans Serif"/>
+            </a:endParaRPr>
+          </a:p>
+          <a:p>
+            <a:pPr marL="242570" indent="-229870">
+              <a:lnSpc>
+                <a:spcPct val="100000"/>
+              </a:lnSpc>
+              <a:spcBef>
+                <a:spcPts val="505"/>
+              </a:spcBef>
+              <a:buChar char="•"/>
+              <a:tabLst>
+                <a:tab pos="242570" algn="l"/>
+              </a:tabLst>
+            </a:pPr>
+            <a:r>
+              <a:rPr sz="2800" dirty="0">
+                <a:latin typeface="Microsoft Sans Serif"/>
+                <a:cs typeface="Microsoft Sans Serif"/>
+              </a:rPr>
+              <a:t>insert(pos,</a:t>
+            </a:r>
+            <a:r>
+              <a:rPr sz="2800" spc="-130" dirty="0">
+                <a:latin typeface="Microsoft Sans Serif"/>
+                <a:cs typeface="Microsoft Sans Serif"/>
+              </a:rPr>
+              <a:t> </a:t>
+            </a:r>
+            <a:r>
+              <a:rPr sz="2800" dirty="0">
+                <a:latin typeface="Microsoft Sans Serif"/>
+                <a:cs typeface="Microsoft Sans Serif"/>
+              </a:rPr>
+              <a:t>string)</a:t>
+            </a:r>
+            <a:r>
+              <a:rPr sz="2800" spc="-125" dirty="0">
+                <a:latin typeface="Microsoft Sans Serif"/>
+                <a:cs typeface="Microsoft Sans Serif"/>
+              </a:rPr>
+              <a:t> </a:t>
+            </a:r>
+            <a:r>
+              <a:rPr sz="2800" dirty="0">
+                <a:latin typeface="Microsoft Sans Serif"/>
+                <a:cs typeface="Microsoft Sans Serif"/>
+              </a:rPr>
+              <a:t>-</a:t>
+            </a:r>
+            <a:r>
+              <a:rPr sz="2800" spc="-135" dirty="0">
+                <a:latin typeface="Microsoft Sans Serif"/>
+                <a:cs typeface="Microsoft Sans Serif"/>
+              </a:rPr>
+              <a:t> </a:t>
+            </a:r>
+            <a:r>
+              <a:rPr sz="2800" dirty="0">
+                <a:latin typeface="Microsoft Sans Serif"/>
+                <a:cs typeface="Microsoft Sans Serif"/>
+              </a:rPr>
+              <a:t>вставить</a:t>
+            </a:r>
+            <a:r>
+              <a:rPr sz="2800" spc="-114" dirty="0">
+                <a:latin typeface="Microsoft Sans Serif"/>
+                <a:cs typeface="Microsoft Sans Serif"/>
+              </a:rPr>
+              <a:t> </a:t>
+            </a:r>
+            <a:r>
+              <a:rPr sz="2800" spc="-10" dirty="0">
+                <a:latin typeface="Microsoft Sans Serif"/>
+                <a:cs typeface="Microsoft Sans Serif"/>
+              </a:rPr>
+              <a:t>строку</a:t>
+            </a:r>
+            <a:r>
+              <a:rPr sz="2800" spc="-145" dirty="0">
+                <a:latin typeface="Microsoft Sans Serif"/>
+                <a:cs typeface="Microsoft Sans Serif"/>
+              </a:rPr>
+              <a:t> </a:t>
+            </a:r>
+            <a:r>
+              <a:rPr sz="2800" dirty="0">
+                <a:latin typeface="Microsoft Sans Serif"/>
+                <a:cs typeface="Microsoft Sans Serif"/>
+              </a:rPr>
+              <a:t>на</a:t>
+            </a:r>
+            <a:r>
+              <a:rPr sz="2800" spc="-125" dirty="0">
+                <a:latin typeface="Microsoft Sans Serif"/>
+                <a:cs typeface="Microsoft Sans Serif"/>
+              </a:rPr>
+              <a:t> </a:t>
+            </a:r>
+            <a:r>
+              <a:rPr sz="2800" dirty="0">
+                <a:latin typeface="Microsoft Sans Serif"/>
+                <a:cs typeface="Microsoft Sans Serif"/>
+              </a:rPr>
+              <a:t>нужную</a:t>
+            </a:r>
+            <a:r>
+              <a:rPr sz="2800" spc="-125" dirty="0">
+                <a:latin typeface="Microsoft Sans Serif"/>
+                <a:cs typeface="Microsoft Sans Serif"/>
+              </a:rPr>
+              <a:t> </a:t>
+            </a:r>
+            <a:r>
+              <a:rPr sz="2800" spc="-10" dirty="0">
+                <a:latin typeface="Microsoft Sans Serif"/>
+                <a:cs typeface="Microsoft Sans Serif"/>
+              </a:rPr>
+              <a:t>позицию</a:t>
+            </a:r>
+            <a:endParaRPr sz="2800" dirty="0">
+              <a:latin typeface="Microsoft Sans Serif"/>
+              <a:cs typeface="Microsoft Sans Serif"/>
+            </a:endParaRPr>
+          </a:p>
+          <a:p>
+            <a:pPr marL="241300" marR="19050" indent="-228600">
+              <a:lnSpc>
+                <a:spcPts val="2890"/>
+              </a:lnSpc>
+              <a:spcBef>
+                <a:spcPts val="1030"/>
+              </a:spcBef>
+              <a:buChar char="•"/>
+              <a:tabLst>
+                <a:tab pos="241300" algn="l"/>
+              </a:tabLst>
+            </a:pPr>
+            <a:r>
+              <a:rPr sz="2800" spc="-10" dirty="0">
+                <a:latin typeface="Microsoft Sans Serif"/>
+                <a:cs typeface="Microsoft Sans Serif"/>
+              </a:rPr>
+              <a:t>replace(start,</a:t>
+            </a:r>
+            <a:r>
+              <a:rPr sz="2800" spc="-110" dirty="0">
+                <a:latin typeface="Microsoft Sans Serif"/>
+                <a:cs typeface="Microsoft Sans Serif"/>
+              </a:rPr>
+              <a:t> </a:t>
+            </a:r>
+            <a:r>
+              <a:rPr sz="2800" dirty="0">
+                <a:latin typeface="Microsoft Sans Serif"/>
+                <a:cs typeface="Microsoft Sans Serif"/>
+              </a:rPr>
+              <a:t>count,</a:t>
+            </a:r>
+            <a:r>
+              <a:rPr sz="2800" spc="-114" dirty="0">
+                <a:latin typeface="Microsoft Sans Serif"/>
+                <a:cs typeface="Microsoft Sans Serif"/>
+              </a:rPr>
+              <a:t> </a:t>
+            </a:r>
+            <a:r>
+              <a:rPr sz="2800" dirty="0">
+                <a:latin typeface="Microsoft Sans Serif"/>
+                <a:cs typeface="Microsoft Sans Serif"/>
+              </a:rPr>
+              <a:t>string)</a:t>
+            </a:r>
+            <a:r>
+              <a:rPr sz="2800" spc="-100" dirty="0">
+                <a:latin typeface="Microsoft Sans Serif"/>
+                <a:cs typeface="Microsoft Sans Serif"/>
+              </a:rPr>
+              <a:t> </a:t>
+            </a:r>
+            <a:r>
+              <a:rPr sz="2800" dirty="0">
+                <a:latin typeface="Microsoft Sans Serif"/>
+                <a:cs typeface="Microsoft Sans Serif"/>
+              </a:rPr>
+              <a:t>-</a:t>
+            </a:r>
+            <a:r>
+              <a:rPr sz="2800" spc="-105" dirty="0">
+                <a:latin typeface="Microsoft Sans Serif"/>
+                <a:cs typeface="Microsoft Sans Serif"/>
+              </a:rPr>
+              <a:t> </a:t>
+            </a:r>
+            <a:r>
+              <a:rPr sz="2800" spc="-25" dirty="0">
+                <a:latin typeface="Microsoft Sans Serif"/>
+                <a:cs typeface="Microsoft Sans Serif"/>
+              </a:rPr>
+              <a:t>заменить</a:t>
+            </a:r>
+            <a:r>
+              <a:rPr sz="2800" spc="-90" dirty="0">
+                <a:latin typeface="Microsoft Sans Serif"/>
+                <a:cs typeface="Microsoft Sans Serif"/>
+              </a:rPr>
+              <a:t> </a:t>
+            </a:r>
+            <a:r>
+              <a:rPr sz="2800" spc="-30" dirty="0">
+                <a:latin typeface="Microsoft Sans Serif"/>
+                <a:cs typeface="Microsoft Sans Serif"/>
+              </a:rPr>
+              <a:t>подстроку</a:t>
+            </a:r>
+            <a:r>
+              <a:rPr sz="2800" spc="-135" dirty="0">
+                <a:latin typeface="Microsoft Sans Serif"/>
+                <a:cs typeface="Microsoft Sans Serif"/>
+              </a:rPr>
+              <a:t> </a:t>
+            </a:r>
+            <a:r>
+              <a:rPr sz="2800" spc="-10" dirty="0">
+                <a:latin typeface="Microsoft Sans Serif"/>
+                <a:cs typeface="Microsoft Sans Serif"/>
+              </a:rPr>
+              <a:t>другой строкой</a:t>
+            </a:r>
+            <a:endParaRPr sz="2800" dirty="0">
+              <a:latin typeface="Microsoft Sans Serif"/>
+              <a:cs typeface="Microsoft Sans Serif"/>
+            </a:endParaRPr>
+          </a:p>
+          <a:p>
+            <a:pPr marL="242570" indent="-229870">
+              <a:lnSpc>
+                <a:spcPct val="100000"/>
+              </a:lnSpc>
+              <a:spcBef>
+                <a:spcPts val="489"/>
+              </a:spcBef>
+              <a:buChar char="•"/>
+              <a:tabLst>
+                <a:tab pos="242570" algn="l"/>
+              </a:tabLst>
+            </a:pPr>
+            <a:r>
+              <a:rPr sz="2800" dirty="0">
+                <a:latin typeface="Microsoft Sans Serif"/>
+                <a:cs typeface="Microsoft Sans Serif"/>
+              </a:rPr>
+              <a:t>erase(start,</a:t>
+            </a:r>
+            <a:r>
+              <a:rPr sz="2800" spc="-150" dirty="0">
+                <a:latin typeface="Microsoft Sans Serif"/>
+                <a:cs typeface="Microsoft Sans Serif"/>
+              </a:rPr>
+              <a:t> </a:t>
+            </a:r>
+            <a:r>
+              <a:rPr sz="2800" dirty="0">
+                <a:latin typeface="Microsoft Sans Serif"/>
+                <a:cs typeface="Microsoft Sans Serif"/>
+              </a:rPr>
+              <a:t>count)</a:t>
+            </a:r>
+            <a:r>
+              <a:rPr sz="2800" spc="-105" dirty="0">
+                <a:latin typeface="Microsoft Sans Serif"/>
+                <a:cs typeface="Microsoft Sans Serif"/>
+              </a:rPr>
+              <a:t> </a:t>
+            </a:r>
+            <a:r>
+              <a:rPr sz="2800" dirty="0">
+                <a:latin typeface="Microsoft Sans Serif"/>
+                <a:cs typeface="Microsoft Sans Serif"/>
+              </a:rPr>
+              <a:t>-</a:t>
+            </a:r>
+            <a:r>
+              <a:rPr sz="2800" spc="-114" dirty="0">
+                <a:latin typeface="Microsoft Sans Serif"/>
+                <a:cs typeface="Microsoft Sans Serif"/>
+              </a:rPr>
+              <a:t> </a:t>
+            </a:r>
+            <a:r>
+              <a:rPr sz="2800" dirty="0">
+                <a:latin typeface="Microsoft Sans Serif"/>
+                <a:cs typeface="Microsoft Sans Serif"/>
+              </a:rPr>
+              <a:t>удалить</a:t>
+            </a:r>
+            <a:r>
+              <a:rPr sz="2800" spc="-114" dirty="0">
+                <a:latin typeface="Microsoft Sans Serif"/>
+                <a:cs typeface="Microsoft Sans Serif"/>
+              </a:rPr>
+              <a:t> </a:t>
+            </a:r>
+            <a:r>
+              <a:rPr sz="2800" spc="-10" dirty="0">
+                <a:latin typeface="Microsoft Sans Serif"/>
+                <a:cs typeface="Microsoft Sans Serif"/>
+              </a:rPr>
+              <a:t>подстроку</a:t>
+            </a:r>
+            <a:endParaRPr sz="2800" dirty="0">
+              <a:latin typeface="Microsoft Sans Serif"/>
+              <a:cs typeface="Microsoft Sans Serif"/>
+            </a:endParaRPr>
+          </a:p>
+          <a:p>
+            <a:pPr marL="242570" indent="-229870">
+              <a:lnSpc>
+                <a:spcPct val="100000"/>
+              </a:lnSpc>
+              <a:spcBef>
+                <a:spcPts val="500"/>
+              </a:spcBef>
+              <a:buClr>
+                <a:srgbClr val="000000"/>
+              </a:buClr>
+              <a:buChar char="•"/>
+              <a:tabLst>
+                <a:tab pos="242570" algn="l"/>
+              </a:tabLst>
+            </a:pPr>
+            <a:r>
+              <a:rPr sz="2800" u="sng" spc="-10" dirty="0">
+                <a:solidFill>
+                  <a:srgbClr val="0462C1"/>
+                </a:solidFill>
+                <a:uFill>
+                  <a:solidFill>
+                    <a:srgbClr val="0462C1"/>
+                  </a:solidFill>
+                </a:uFill>
+                <a:latin typeface="Microsoft Sans Serif"/>
+                <a:cs typeface="Microsoft Sans Serif"/>
+                <a:hlinkClick r:id="rId2"/>
+              </a:rPr>
+              <a:t>cppreference</a:t>
+            </a:r>
+            <a:endParaRPr sz="2800" dirty="0">
               <a:latin typeface="Microsoft Sans Serif"/>
               <a:cs typeface="Microsoft Sans Serif"/>
             </a:endParaRPr>
